--- a/3rdSem/Assignments/pptx/python/PPT_BES00007_Python_Sayantan_Bharati.pptx
+++ b/3rdSem/Assignments/pptx/python/PPT_BES00007_Python_Sayantan_Bharati.pptx
@@ -4,6 +4,9 @@
   <p:sldMasterIdLst>
     <p:sldMasterId id="2147483648" r:id="rId1"/>
   </p:sldMasterIdLst>
+  <p:notesMasterIdLst>
+    <p:notesMasterId r:id="rId16"/>
+  </p:notesMasterIdLst>
   <p:sldIdLst>
     <p:sldId id="256" r:id="rId2"/>
     <p:sldId id="257" r:id="rId3"/>
@@ -15,14 +18,11 @@
     <p:sldId id="263" r:id="rId9"/>
     <p:sldId id="264" r:id="rId10"/>
     <p:sldId id="265" r:id="rId11"/>
-    <p:sldId id="266" r:id="rId17"/>
-    <p:sldId id="267" r:id="rId18"/>
-    <p:sldId id="268" r:id="rId19"/>
-    <p:sldId id="269" r:id="rId20"/>
+    <p:sldId id="266" r:id="rId12"/>
+    <p:sldId id="267" r:id="rId13"/>
+    <p:sldId id="268" r:id="rId14"/>
+    <p:sldId id="269" r:id="rId15"/>
   </p:sldIdLst>
-  <p:notesMasterIdLst>
-    <p:notesMasterId r:id="rId12"/>
-  </p:notesMasterIdLst>
   <p:sldSz cx="12192000" cy="6858000"/>
   <p:notesSz cx="6858000" cy="12192000"/>
   <p:defaultTextStyle>
@@ -117,6 +117,11 @@
       </a:defRPr>
     </a:lvl9pPr>
   </p:defaultTextStyle>
+  <p:extLst>
+    <p:ext uri="{EFAFB233-063F-42B5-8137-9DF3F51BA10A}">
+      <p15:sldGuideLst xmlns:p15="http://schemas.microsoft.com/office/powerpoint/2012/main"/>
+    </p:ext>
+  </p:extLst>
 </p:presentation>
 </file>
 
@@ -142,234 +147,10 @@
           <a:chExt cx="0" cy="0"/>
         </a:xfrm>
       </p:grpSpPr>
-      <p:sp>
-        <p:nvSpPr>
-          <p:cNvPr id="2" name="Header Placeholder 1"/>
-          <p:cNvSpPr>
-            <a:spLocks noGrp="1"/>
-          </p:cNvSpPr>
-          <p:nvPr>
-            <p:ph type="hdr" sz="quarter"/>
-          </p:nvPr>
-        </p:nvSpPr>
-        <p:spPr>
-          <a:xfrm>
-            <a:off x="0" y="0"/>
-            <a:ext cx="2971800" cy="458788"/>
-          </a:xfrm>
-          <a:prstGeom prst="rect">
-            <a:avLst/>
-          </a:prstGeom>
-        </p:spPr>
-        <p:txBody>
-          <a:bodyPr vert="horz" lIns="91440" tIns="45720" rIns="91440" bIns="45720" rtlCol="0"/>
-          <a:lstStyle>
-            <a:lvl1pPr algn="l">
-              <a:defRPr sz="1200"/>
-            </a:lvl1pPr>
-          </a:lstStyle>
-          <a:p>
-            <a:endParaRPr lang="en-US"/>
-          </a:p>
-        </p:txBody>
-      </p:sp>
-      <p:sp>
-        <p:nvSpPr>
-          <p:cNvPr id="3" name="Date Placeholder 2"/>
-          <p:cNvSpPr>
-            <a:spLocks noGrp="1"/>
-          </p:cNvSpPr>
-          <p:nvPr>
-            <p:ph type="dt" idx="1"/>
-          </p:nvPr>
-        </p:nvSpPr>
-        <p:spPr>
-          <a:xfrm>
-            <a:off x="3884613" y="0"/>
-            <a:ext cx="2971800" cy="458788"/>
-          </a:xfrm>
-          <a:prstGeom prst="rect">
-            <a:avLst/>
-          </a:prstGeom>
-        </p:spPr>
-        <p:txBody>
-          <a:bodyPr vert="horz" lIns="91440" tIns="45720" rIns="91440" bIns="45720" rtlCol="0"/>
-          <a:lstStyle>
-            <a:lvl1pPr algn="r">
-              <a:defRPr sz="1200"/>
-            </a:lvl1pPr>
-          </a:lstStyle>
-          <a:p>
-            <a:fld id="{5282F153-3F37-0F45-9E97-73ACFA13230C}" type="datetimeFigureOut">
-              <a:rPr lang="en-US"/>
-              <a:t>7/23/19</a:t>
-            </a:fld>
-            <a:endParaRPr lang="en-US"/>
-          </a:p>
-        </p:txBody>
-      </p:sp>
-      <p:sp>
-        <p:nvSpPr>
-          <p:cNvPr id="4" name="Slide Image Placeholder 3"/>
-          <p:cNvSpPr>
-            <a:spLocks noGrp="1" noRot="1" noChangeAspect="1"/>
-          </p:cNvSpPr>
-          <p:nvPr>
-            <p:ph type="sldImg" idx="2"/>
-          </p:nvPr>
-        </p:nvSpPr>
-        <p:spPr>
-          <a:xfrm>
-            <a:off x="685800" y="1143000"/>
-            <a:ext cx="5486400" cy="3086100"/>
-          </a:xfrm>
-          <a:prstGeom prst="rect">
-            <a:avLst/>
-          </a:prstGeom>
-          <a:noFill/>
-          <a:ln w="12700">
-            <a:solidFill>
-              <a:prstClr val="black"/>
-            </a:solidFill>
-          </a:ln>
-        </p:spPr>
-        <p:txBody>
-          <a:bodyPr vert="horz" lIns="91440" tIns="45720" rIns="91440" bIns="45720" rtlCol="0" anchor="ctr"/>
-          <a:lstStyle/>
-          <a:p>
-            <a:endParaRPr lang="en-US"/>
-          </a:p>
-        </p:txBody>
-      </p:sp>
-      <p:sp>
-        <p:nvSpPr>
-          <p:cNvPr id="5" name="Notes Placeholder 4"/>
-          <p:cNvSpPr>
-            <a:spLocks noGrp="1"/>
-          </p:cNvSpPr>
-          <p:nvPr>
-            <p:ph type="body" sz="quarter" idx="3"/>
-          </p:nvPr>
-        </p:nvSpPr>
-        <p:spPr>
-          <a:xfrm>
-            <a:off x="685800" y="4400550"/>
-            <a:ext cx="5486400" cy="3600450"/>
-          </a:xfrm>
-          <a:prstGeom prst="rect">
-            <a:avLst/>
-          </a:prstGeom>
-        </p:spPr>
-        <p:txBody>
-          <a:bodyPr vert="horz" lIns="91440" tIns="45720" rIns="91440" bIns="45720" rtlCol="0"/>
-          <a:lstStyle/>
-          <a:p>
-            <a:pPr lvl="0"/>
-            <a:r>
-              <a:rPr lang="en-US"/>
-              <a:t>Click to edit Master text styles</a:t>
-            </a:r>
-          </a:p>
-          <a:p>
-            <a:pPr lvl="1"/>
-            <a:r>
-              <a:rPr lang="en-US"/>
-              <a:t>Second level</a:t>
-            </a:r>
-          </a:p>
-          <a:p>
-            <a:pPr lvl="2"/>
-            <a:r>
-              <a:rPr lang="en-US"/>
-              <a:t>Third level</a:t>
-            </a:r>
-          </a:p>
-          <a:p>
-            <a:pPr lvl="3"/>
-            <a:r>
-              <a:rPr lang="en-US"/>
-              <a:t>Fourth level</a:t>
-            </a:r>
-          </a:p>
-          <a:p>
-            <a:pPr lvl="4"/>
-            <a:r>
-              <a:rPr lang="en-US"/>
-              <a:t>Fifth level</a:t>
-            </a:r>
-          </a:p>
-        </p:txBody>
-      </p:sp>
-      <p:sp>
-        <p:nvSpPr>
-          <p:cNvPr id="6" name="Footer Placeholder 5"/>
-          <p:cNvSpPr>
-            <a:spLocks noGrp="1"/>
-          </p:cNvSpPr>
-          <p:nvPr>
-            <p:ph type="ftr" sz="quarter" idx="4"/>
-          </p:nvPr>
-        </p:nvSpPr>
-        <p:spPr>
-          <a:xfrm>
-            <a:off x="0" y="8685213"/>
-            <a:ext cx="2971800" cy="458787"/>
-          </a:xfrm>
-          <a:prstGeom prst="rect">
-            <a:avLst/>
-          </a:prstGeom>
-        </p:spPr>
-        <p:txBody>
-          <a:bodyPr vert="horz" lIns="91440" tIns="45720" rIns="91440" bIns="45720" rtlCol="0" anchor="b"/>
-          <a:lstStyle>
-            <a:lvl1pPr algn="l">
-              <a:defRPr sz="1200"/>
-            </a:lvl1pPr>
-          </a:lstStyle>
-          <a:p>
-            <a:endParaRPr lang="en-US"/>
-          </a:p>
-        </p:txBody>
-      </p:sp>
-      <p:sp>
-        <p:nvSpPr>
-          <p:cNvPr id="7" name="Slide Number Placeholder 6"/>
-          <p:cNvSpPr>
-            <a:spLocks noGrp="1"/>
-          </p:cNvSpPr>
-          <p:nvPr>
-            <p:ph type="sldNum" sz="quarter" idx="5"/>
-          </p:nvPr>
-        </p:nvSpPr>
-        <p:spPr>
-          <a:xfrm>
-            <a:off x="3884613" y="8685213"/>
-            <a:ext cx="2971800" cy="458787"/>
-          </a:xfrm>
-          <a:prstGeom prst="rect">
-            <a:avLst/>
-          </a:prstGeom>
-        </p:spPr>
-        <p:txBody>
-          <a:bodyPr vert="horz" lIns="91440" tIns="45720" rIns="91440" bIns="45720" rtlCol="0" anchor="b"/>
-          <a:lstStyle>
-            <a:lvl1pPr algn="r">
-              <a:defRPr sz="1200"/>
-            </a:lvl1pPr>
-          </a:lstStyle>
-          <a:p>
-            <a:fld id="{CE5E9CC1-C706-0F49-92D6-E571CC5EEA8F}" type="slidenum">
-              <a:rPr lang="en-US"/>
-              <a:t>‹#›</a:t>
-            </a:fld>
-            <a:endParaRPr lang="en-US"/>
-          </a:p>
-        </p:txBody>
-      </p:sp>
     </p:spTree>
     <p:extLst>
       <p:ext uri="{BB962C8B-B14F-4D97-AF65-F5344CB8AC3E}">
-        <p14:creationId xmlns:p14="http://schemas.microsoft.com/office/powerpoint/2010/main" val="1024086991"/>
+        <p14:creationId xmlns:p14="http://schemas.microsoft.com/office/powerpoint/2010/main" val="2990819790"/>
       </p:ext>
     </p:extLst>
   </p:cSld>
@@ -515,9 +296,16 @@
           <a:p>
             <a:r>
               <a:rPr lang="en-US" dirty="0"/>
-              <a:t>Good morning. I am Sayantan Bharati, and my topic is an Email Validation System in Python — a program that decides whether an e-mail address is correctly formed and, ideally, whether it can actually receive mail.</a:t>
-            </a:r>
-            <a:endParaRPr lang="en-US" dirty="0"/>
+              <a:t>Good morning. I am Sayantan Bharati, and my topic is an Email Validation System in </a:t>
+            </a:r>
+            <a:r>
+              <a:rPr lang="en-US"/>
+              <a:t>Python : </a:t>
+            </a:r>
+            <a:r>
+              <a:rPr lang="en-US" dirty="0"/>
+              <a:t>a program that decides whether an e-mail address is correctly formed and, ideally, whether it can actually receive mail.</a:t>
+            </a:r>
           </a:p>
         </p:txBody>
       </p:sp>
@@ -603,9 +391,16 @@
           <a:p>
             <a:r>
               <a:rPr lang="en-US" dirty="0"/>
-              <a:t>The deeper level is asking the internet. An MX lookup tells us whether the domain can receive mail at all. A full SMTP check can even ask about a specific mailbox, but many servers block it, so a failure there is never proof that the address is fake — we treat uncertainty as "unknown", not "invalid".</a:t>
-            </a:r>
-            <a:endParaRPr lang="en-US" dirty="0"/>
+              <a:t>The deeper level is asking the internet. An MX lookup tells us whether the domain can receive mail at all. A full SMTP check can even ask about a specific mailbox, but many servers block it, so a failure there is never proof that the address is </a:t>
+            </a:r>
+            <a:r>
+              <a:rPr lang="en-US"/>
+              <a:t>fake : </a:t>
+            </a:r>
+            <a:r>
+              <a:rPr lang="en-US" dirty="0"/>
+              <a:t>we treat uncertainty as "unknown", not "invalid".</a:t>
+            </a:r>
           </a:p>
         </p:txBody>
       </p:sp>
@@ -691,9 +486,24 @@
           <a:p>
             <a:r>
               <a:rPr lang="en-US" dirty="0"/>
-              <a:t>A validator is only as good as its tests. We check the obvious good and bad cases, but also the tricky ones — plus-tagging, sub-domains, uppercase — and we assert on the exact reason message, not just the yes-or-no. That is how we prove it is neither too strict nor too permissive.</a:t>
-            </a:r>
-            <a:endParaRPr lang="en-US" dirty="0"/>
+              <a:t>A validator is only as good as its tests. We check the obvious good and bad cases, but also the tricky </a:t>
+            </a:r>
+            <a:r>
+              <a:rPr lang="en-US"/>
+              <a:t>ones : </a:t>
+            </a:r>
+            <a:r>
+              <a:rPr lang="en-US" dirty="0"/>
+              <a:t>plus-tagging, sub-domains, </a:t>
+            </a:r>
+            <a:r>
+              <a:rPr lang="en-US"/>
+              <a:t>uppercase : </a:t>
+            </a:r>
+            <a:r>
+              <a:rPr lang="en-US" dirty="0"/>
+              <a:t>and we assert on the exact reason message, not just the yes-or-no. That is how we prove it is neither too strict nor too permissive.</a:t>
+            </a:r>
           </a:p>
         </p:txBody>
       </p:sp>
@@ -714,7 +524,7 @@
           <a:p>
             <a:fld id="{F7021451-1387-4CA6-816F-3879F97B5CBC}" type="slidenum">
               <a:rPr lang="en-US"/>
-              <a:t>10</a:t>
+              <a:t>11</a:t>
             </a:fld>
             <a:endParaRPr lang="en-US"/>
           </a:p>
@@ -781,7 +591,6 @@
               <a:rPr lang="en-US" dirty="0"/>
               <a:t>In practice, this system is used in signup forms, newsletters and CRM cleanup. The main caution is balance: rules that are too strict reject real people, and full mailbox checks are slow and sometimes blocked. It is also personal data, so it should be handled carefully.</a:t>
             </a:r>
-            <a:endParaRPr lang="en-US" dirty="0"/>
           </a:p>
         </p:txBody>
       </p:sp>
@@ -802,7 +611,7 @@
           <a:p>
             <a:fld id="{F7021451-1387-4CA6-816F-3879F97B5CBC}" type="slidenum">
               <a:rPr lang="en-US"/>
-              <a:t>10</a:t>
+              <a:t>12</a:t>
             </a:fld>
             <a:endParaRPr lang="en-US"/>
           </a:p>
@@ -867,9 +676,16 @@
           <a:p>
             <a:r>
               <a:rPr lang="en-US" dirty="0"/>
-              <a:t>To summarise: validate in layers from cheap to expensive, normalise your input, write clear messages, and remember that the only definitive way to confirm an address is to send a verification e-mail. This project is small, but it is a complete example of practical Python — and that is my conclusion.</a:t>
-            </a:r>
-            <a:endParaRPr lang="en-US" dirty="0"/>
+              <a:t>To summarise: validate in layers from cheap to expensive, normalise your input, write clear messages, and remember that the only definitive way to confirm an address is to send a verification e-mail. This project is small, but it is a complete example of practical </a:t>
+            </a:r>
+            <a:r>
+              <a:rPr lang="en-US"/>
+              <a:t>Python : </a:t>
+            </a:r>
+            <a:r>
+              <a:rPr lang="en-US" dirty="0"/>
+              <a:t>and that is my conclusion.</a:t>
+            </a:r>
           </a:p>
         </p:txBody>
       </p:sp>
@@ -890,7 +706,7 @@
           <a:p>
             <a:fld id="{F7021451-1387-4CA6-816F-3879F97B5CBC}" type="slidenum">
               <a:rPr lang="en-US"/>
-              <a:t>10</a:t>
+              <a:t>13</a:t>
             </a:fld>
             <a:endParaRPr lang="en-US"/>
           </a:p>
@@ -955,9 +771,16 @@
           <a:p>
             <a:r>
               <a:rPr lang="en-US" dirty="0"/>
-              <a:t>These are the standard references behind this presentation. Thank you for listening — I am happy to take any questions.</a:t>
-            </a:r>
-            <a:endParaRPr lang="en-US" dirty="0"/>
+              <a:t>These are the standard references behind this presentation. Thank you for </a:t>
+            </a:r>
+            <a:r>
+              <a:rPr lang="en-US"/>
+              <a:t>listening : </a:t>
+            </a:r>
+            <a:r>
+              <a:rPr lang="en-US" dirty="0"/>
+              <a:t>I am happy to take any questions.</a:t>
+            </a:r>
           </a:p>
         </p:txBody>
       </p:sp>
@@ -978,7 +801,7 @@
           <a:p>
             <a:fld id="{F7021451-1387-4CA6-816F-3879F97B5CBC}" type="slidenum">
               <a:rPr lang="en-US"/>
-              <a:t>10</a:t>
+              <a:t>14</a:t>
             </a:fld>
             <a:endParaRPr lang="en-US"/>
           </a:p>
@@ -1043,9 +866,16 @@
           <a:p>
             <a:r>
               <a:rPr lang="en-US" dirty="0"/>
-              <a:t>The motivation is practical — bad addresses cost us real communication. We need to check them as early as possible. This little program is also a tour of the Python syllabus: we will use string methods, regular expressions, functions, modules, error handling and classes.</a:t>
-            </a:r>
-            <a:endParaRPr lang="en-US" dirty="0"/>
+              <a:t>The motivation is </a:t>
+            </a:r>
+            <a:r>
+              <a:rPr lang="en-US"/>
+              <a:t>practical : </a:t>
+            </a:r>
+            <a:r>
+              <a:rPr lang="en-US" dirty="0"/>
+              <a:t>bad addresses cost us real communication. We need to check them as early as possible. This little program is also a tour of the Python syllabus: we will use string methods, regular expressions, functions, modules, error handling and classes.</a:t>
+            </a:r>
           </a:p>
         </p:txBody>
       </p:sp>
@@ -1131,9 +961,24 @@
           <a:p>
             <a:r>
               <a:rPr lang="en-US" dirty="0"/>
-              <a:t>I will first define what a valid address actually looks like, then compare three ways to validate one — regex, manual string parsing, and library/DNS checks — then show the system design, walk through the code, test the edge cases, and finish with applications and limitations.</a:t>
-            </a:r>
-            <a:endParaRPr lang="en-US" dirty="0"/>
+              <a:t>I will first define what a valid address actually looks like, then compare three ways to validate </a:t>
+            </a:r>
+            <a:r>
+              <a:rPr lang="en-US"/>
+              <a:t>one : </a:t>
+            </a:r>
+            <a:r>
+              <a:rPr lang="en-US" dirty="0"/>
+              <a:t>regex, manual string parsing, and library/DNS </a:t>
+            </a:r>
+            <a:r>
+              <a:rPr lang="en-US"/>
+              <a:t>checks : </a:t>
+            </a:r>
+            <a:r>
+              <a:rPr lang="en-US" dirty="0"/>
+              <a:t>then show the system design, walk through the code, test the edge cases, and finish with applications and limitations.</a:t>
+            </a:r>
           </a:p>
         </p:txBody>
       </p:sp>
@@ -1221,7 +1066,6 @@
               <a:rPr lang="en-US" dirty="0"/>
               <a:t>Before we can check an address, we must know its structure. Every address has a local part, an at-sign, and a domain that ends in a top-level domain. The local part has strict rules about dots, and there are length limits, all defined in the RFC standards.</a:t>
             </a:r>
-            <a:endParaRPr lang="en-US" dirty="0"/>
           </a:p>
         </p:txBody>
       </p:sp>
@@ -1309,7 +1153,6 @@
               <a:rPr lang="en-US" dirty="0"/>
               <a:t>There are three levels of checking, and they differ in cost. A regular expression is instant and offline. Manual parsing is more explicit but longer to write. DNS and SMTP checks are the most reliable but need a network call, so we only do them after the cheap checks pass.</a:t>
             </a:r>
-            <a:endParaRPr lang="en-US" dirty="0"/>
           </a:p>
         </p:txBody>
       </p:sp>
@@ -1397,7 +1240,6 @@
               <a:rPr lang="en-US" dirty="0"/>
               <a:t>This is the heart of the syntax check. The pattern says: one or more allowed characters, an at-sign, a domain, a dot, and a TLD of at least two letters. Using fullmatch and anchoring makes sure we test the entire string, so a stray space or trailing text cannot slip through.</a:t>
             </a:r>
-            <a:endParaRPr lang="en-US" dirty="0"/>
           </a:p>
         </p:txBody>
       </p:sp>
@@ -1485,7 +1327,6 @@
               <a:rPr lang="en-US" dirty="0"/>
               <a:t>Regex is not the only way. We can do exactly the same job with ordinary string methods, and the advantage is that each rule produces its own tailored error message. For a user-facing form that is very valuable. This also makes the logic easy to explain line by line.</a:t>
             </a:r>
-            <a:endParaRPr lang="en-US" dirty="0"/>
           </a:p>
         </p:txBody>
       </p:sp>
@@ -1573,7 +1414,6 @@
               <a:rPr lang="en-US" dirty="0"/>
               <a:t>The design is a pipeline. We normalise the input, run the cheap syntax test, then the domain check, then optionally the SMTP check. Each stage can reject with a reason, and network steps are wrapped in exception handling so the program never crashes on a bad connection.</a:t>
             </a:r>
-            <a:endParaRPr lang="en-US" dirty="0"/>
           </a:p>
         </p:txBody>
       </p:sp>
@@ -1659,9 +1499,24 @@
           <a:p>
             <a:r>
               <a:rPr lang="en-US" dirty="0"/>
-              <a:t>This slide shows the object-oriented version. The rules live inside one class, each check is a method, and the result is a small data object. That structure uses almost every topic we covered this semester — modules, functions, exception handling and classes — and it makes the system easy to extend.</a:t>
-            </a:r>
-            <a:endParaRPr lang="en-US" dirty="0"/>
+              <a:t>This slide shows the object-oriented version. The rules live inside one class, each check is a method, and the result is a small data object. That structure uses almost every topic we covered this </a:t>
+            </a:r>
+            <a:r>
+              <a:rPr lang="en-US"/>
+              <a:t>semester : </a:t>
+            </a:r>
+            <a:r>
+              <a:rPr lang="en-US" dirty="0"/>
+              <a:t>modules, functions, exception handling and </a:t>
+            </a:r>
+            <a:r>
+              <a:rPr lang="en-US"/>
+              <a:t>classes : </a:t>
+            </a:r>
+            <a:r>
+              <a:rPr lang="en-US" dirty="0"/>
+              <a:t>and it makes the system easy to extend.</a:t>
+            </a:r>
           </a:p>
         </p:txBody>
       </p:sp>
@@ -1739,11 +1594,12 @@
         <a:solidFill>
           <a:srgbClr val="FFFFFF"/>
         </a:solidFill>
+        <a:effectLst/>
       </p:bgPr>
     </p:bg>
     <p:spTree>
       <p:nvGrpSpPr>
-        <p:cNvPr id="2" name=""/>
+        <p:cNvPr id="1" name=""/>
         <p:cNvGrpSpPr/>
         <p:nvPr/>
       </p:nvGrpSpPr>
@@ -1777,6 +1633,13 @@
             <a:prstDash val="solid"/>
           </a:ln>
         </p:spPr>
+        <p:txBody>
+          <a:bodyPr/>
+          <a:lstStyle/>
+          <a:p>
+            <a:endParaRPr lang="en-IN"/>
+          </a:p>
+        </p:txBody>
       </p:sp>
       <p:sp>
         <p:nvSpPr>
@@ -1800,6 +1663,13 @@
             <a:prstDash val="solid"/>
           </a:ln>
         </p:spPr>
+        <p:txBody>
+          <a:bodyPr/>
+          <a:lstStyle/>
+          <a:p>
+            <a:endParaRPr lang="en-IN"/>
+          </a:p>
+        </p:txBody>
       </p:sp>
       <p:sp>
         <p:nvSpPr>
@@ -1843,6 +1713,13 @@
           </a:solidFill>
           <a:ln/>
         </p:spPr>
+        <p:txBody>
+          <a:bodyPr/>
+          <a:lstStyle/>
+          <a:p>
+            <a:endParaRPr lang="en-IN"/>
+          </a:p>
+        </p:txBody>
       </p:sp>
       <p:sp>
         <p:nvSpPr>
@@ -1886,6 +1763,13 @@
           </a:solidFill>
           <a:ln/>
         </p:spPr>
+        <p:txBody>
+          <a:bodyPr/>
+          <a:lstStyle/>
+          <a:p>
+            <a:endParaRPr lang="en-IN"/>
+          </a:p>
+        </p:txBody>
       </p:sp>
       <p:sp>
         <p:nvSpPr>
@@ -1926,6 +1810,13 @@
           </a:solidFill>
           <a:ln/>
         </p:spPr>
+        <p:txBody>
+          <a:bodyPr/>
+          <a:lstStyle/>
+          <a:p>
+            <a:endParaRPr lang="en-IN"/>
+          </a:p>
+        </p:txBody>
       </p:sp>
       <p:sp>
         <p:nvSpPr>
@@ -1969,6 +1860,13 @@
           </a:solidFill>
           <a:ln/>
         </p:spPr>
+        <p:txBody>
+          <a:bodyPr/>
+          <a:lstStyle/>
+          <a:p>
+            <a:endParaRPr lang="en-IN"/>
+          </a:p>
+        </p:txBody>
       </p:sp>
       <p:sp>
         <p:nvSpPr>
@@ -2012,6 +1910,13 @@
           </a:solidFill>
           <a:ln/>
         </p:spPr>
+        <p:txBody>
+          <a:bodyPr/>
+          <a:lstStyle/>
+          <a:p>
+            <a:endParaRPr lang="en-IN"/>
+          </a:p>
+        </p:txBody>
       </p:sp>
       <p:sp>
         <p:nvSpPr>
@@ -2055,6 +1960,13 @@
           </a:solidFill>
           <a:ln/>
         </p:spPr>
+        <p:txBody>
+          <a:bodyPr/>
+          <a:lstStyle/>
+          <a:p>
+            <a:endParaRPr lang="en-IN"/>
+          </a:p>
+        </p:txBody>
       </p:sp>
       <p:sp>
         <p:nvSpPr>
@@ -2095,46 +2007,13 @@
           </a:solidFill>
           <a:ln/>
         </p:spPr>
-      </p:sp>
-      <p:sp>
-        <p:nvSpPr>
-          <p:cNvPr id="12" name="deco left"/>
-          <p:cNvSpPr/>
-          <p:nvPr/>
-        </p:nvSpPr>
-        <p:spPr>
-          <a:xfrm>
-            <a:off x="0" y="0"/>
-            <a:ext cx="838200" cy="5667375"/>
-          </a:xfrm>
-          <a:custGeom>
-            <a:avLst/>
-            <a:gdLst/>
-            <a:ahLst/>
-            <a:cxnLst/>
-            <a:rect l="l" t="t" r="r" b="b"/>
-            <a:pathLst>
-              <a:path w="838200" h="5667375">
-                <a:moveTo>
-                  <a:pt x="838200" y="0"/>
-                </a:moveTo>
-                <a:lnTo>
-                  <a:pt x="0" y="5667375"/>
-                </a:lnTo>
-                <a:lnTo>
-                  <a:pt x="0" y="0"/>
-                </a:lnTo>
-                <a:close/>
-              </a:path>
-            </a:pathLst>
-          </a:custGeom>
-          <a:solidFill>
-            <a:srgbClr val="90C226">
-              <a:alpha val="85000"/>
-            </a:srgbClr>
-          </a:solidFill>
-          <a:ln/>
-        </p:spPr>
+        <p:txBody>
+          <a:bodyPr/>
+          <a:lstStyle/>
+          <a:p>
+            <a:endParaRPr lang="en-IN"/>
+          </a:p>
+        </p:txBody>
       </p:sp>
     </p:spTree>
   </p:cSld>
@@ -2152,11 +2031,12 @@
         <a:solidFill>
           <a:srgbClr val="FFFFFF"/>
         </a:solidFill>
+        <a:effectLst/>
       </p:bgPr>
     </p:bg>
     <p:spTree>
       <p:nvGrpSpPr>
-        <p:cNvPr id="2" name=""/>
+        <p:cNvPr id="1" name=""/>
         <p:cNvGrpSpPr/>
         <p:nvPr/>
       </p:nvGrpSpPr>
@@ -2190,6 +2070,13 @@
             <a:prstDash val="solid"/>
           </a:ln>
         </p:spPr>
+        <p:txBody>
+          <a:bodyPr/>
+          <a:lstStyle/>
+          <a:p>
+            <a:endParaRPr lang="en-IN"/>
+          </a:p>
+        </p:txBody>
       </p:sp>
       <p:sp>
         <p:nvSpPr>
@@ -2213,6 +2100,13 @@
             <a:prstDash val="solid"/>
           </a:ln>
         </p:spPr>
+        <p:txBody>
+          <a:bodyPr/>
+          <a:lstStyle/>
+          <a:p>
+            <a:endParaRPr lang="en-IN"/>
+          </a:p>
+        </p:txBody>
       </p:sp>
       <p:sp>
         <p:nvSpPr>
@@ -2256,6 +2150,13 @@
           </a:solidFill>
           <a:ln/>
         </p:spPr>
+        <p:txBody>
+          <a:bodyPr/>
+          <a:lstStyle/>
+          <a:p>
+            <a:endParaRPr lang="en-IN"/>
+          </a:p>
+        </p:txBody>
       </p:sp>
       <p:sp>
         <p:nvSpPr>
@@ -2299,6 +2200,13 @@
           </a:solidFill>
           <a:ln/>
         </p:spPr>
+        <p:txBody>
+          <a:bodyPr/>
+          <a:lstStyle/>
+          <a:p>
+            <a:endParaRPr lang="en-IN"/>
+          </a:p>
+        </p:txBody>
       </p:sp>
       <p:sp>
         <p:nvSpPr>
@@ -2339,6 +2247,13 @@
           </a:solidFill>
           <a:ln/>
         </p:spPr>
+        <p:txBody>
+          <a:bodyPr/>
+          <a:lstStyle/>
+          <a:p>
+            <a:endParaRPr lang="en-IN"/>
+          </a:p>
+        </p:txBody>
       </p:sp>
       <p:sp>
         <p:nvSpPr>
@@ -2382,6 +2297,13 @@
           </a:solidFill>
           <a:ln/>
         </p:spPr>
+        <p:txBody>
+          <a:bodyPr/>
+          <a:lstStyle/>
+          <a:p>
+            <a:endParaRPr lang="en-IN"/>
+          </a:p>
+        </p:txBody>
       </p:sp>
       <p:sp>
         <p:nvSpPr>
@@ -2425,6 +2347,13 @@
           </a:solidFill>
           <a:ln/>
         </p:spPr>
+        <p:txBody>
+          <a:bodyPr/>
+          <a:lstStyle/>
+          <a:p>
+            <a:endParaRPr lang="en-IN"/>
+          </a:p>
+        </p:txBody>
       </p:sp>
       <p:sp>
         <p:nvSpPr>
@@ -2468,6 +2397,13 @@
           </a:solidFill>
           <a:ln/>
         </p:spPr>
+        <p:txBody>
+          <a:bodyPr/>
+          <a:lstStyle/>
+          <a:p>
+            <a:endParaRPr lang="en-IN"/>
+          </a:p>
+        </p:txBody>
       </p:sp>
       <p:sp>
         <p:nvSpPr>
@@ -2508,6 +2444,13 @@
           </a:solidFill>
           <a:ln/>
         </p:spPr>
+        <p:txBody>
+          <a:bodyPr/>
+          <a:lstStyle/>
+          <a:p>
+            <a:endParaRPr lang="en-IN"/>
+          </a:p>
+        </p:txBody>
       </p:sp>
       <p:sp>
         <p:nvSpPr>
@@ -2548,6 +2491,13 @@
           </a:solidFill>
           <a:ln/>
         </p:spPr>
+        <p:txBody>
+          <a:bodyPr/>
+          <a:lstStyle/>
+          <a:p>
+            <a:endParaRPr lang="en-IN"/>
+          </a:p>
+        </p:txBody>
       </p:sp>
     </p:spTree>
   </p:cSld>
@@ -2560,6 +2510,11 @@
 <file path=ppt/slideMasters/slideMaster1.xml><?xml version="1.0" encoding="utf-8"?>
 <p:sldMaster xmlns:a="http://schemas.openxmlformats.org/drawingml/2006/main" xmlns:r="http://schemas.openxmlformats.org/officeDocument/2006/relationships" xmlns:p="http://schemas.openxmlformats.org/presentationml/2006/main">
   <p:cSld>
+    <p:bg>
+      <p:bgRef idx="1001">
+        <a:schemeClr val="bg1"/>
+      </p:bgRef>
+    </p:bg>
     <p:spTree>
       <p:nvGrpSpPr>
         <p:cNvPr id="1" name=""/>
@@ -2574,6 +2529,70 @@
           <a:chExt cx="0" cy="0"/>
         </a:xfrm>
       </p:grpSpPr>
+      <p:pic>
+        <p:nvPicPr>
+          <p:cNvPr id="3" name="Picture 2">
+            <a:extLst>
+              <a:ext uri="{FF2B5EF4-FFF2-40B4-BE49-F238E27FC236}">
+                <a16:creationId xmlns:a16="http://schemas.microsoft.com/office/drawing/2014/main" id="{2CB4C86A-96BF-EE86-ABCE-4C614623CC74}"/>
+              </a:ext>
+            </a:extLst>
+          </p:cNvPr>
+          <p:cNvPicPr>
+            <a:picLocks noChangeAspect="1"/>
+          </p:cNvPicPr>
+          <p:nvPr userDrawn="1"/>
+        </p:nvPicPr>
+        <p:blipFill>
+          <a:blip r:embed="rId5">
+            <a:alphaModFix amt="20000"/>
+          </a:blip>
+          <a:stretch>
+            <a:fillRect/>
+          </a:stretch>
+        </p:blipFill>
+        <p:spPr>
+          <a:xfrm>
+            <a:off x="2517120" y="-65272"/>
+            <a:ext cx="7157759" cy="6988544"/>
+          </a:xfrm>
+          <a:prstGeom prst="rect">
+            <a:avLst/>
+          </a:prstGeom>
+        </p:spPr>
+      </p:pic>
+      <p:pic>
+        <p:nvPicPr>
+          <p:cNvPr id="6" name="Picture 5">
+            <a:extLst>
+              <a:ext uri="{FF2B5EF4-FFF2-40B4-BE49-F238E27FC236}">
+                <a16:creationId xmlns:a16="http://schemas.microsoft.com/office/drawing/2014/main" id="{E70BA88C-B0ED-AA73-BCA3-E74A3D6EB7F6}"/>
+              </a:ext>
+            </a:extLst>
+          </p:cNvPr>
+          <p:cNvPicPr>
+            <a:picLocks noChangeAspect="1"/>
+          </p:cNvPicPr>
+          <p:nvPr userDrawn="1"/>
+        </p:nvPicPr>
+        <p:blipFill>
+          <a:blip r:embed="rId5">
+            <a:alphaModFix/>
+          </a:blip>
+          <a:stretch>
+            <a:fillRect/>
+          </a:stretch>
+        </p:blipFill>
+        <p:spPr>
+          <a:xfrm>
+            <a:off x="60385" y="60385"/>
+            <a:ext cx="547787" cy="534838"/>
+          </a:xfrm>
+          <a:prstGeom prst="rect">
+            <a:avLst/>
+          </a:prstGeom>
+        </p:spPr>
+      </p:pic>
     </p:spTree>
   </p:cSld>
   <p:clrMap bg1="lt1" tx1="dk1" bg2="lt2" tx2="dk2" accent1="accent1" accent2="accent2" accent3="accent3" accent4="accent4" accent5="accent5" accent6="accent6" hlink="hlink" folHlink="folHlink"/>
@@ -2873,7 +2892,7 @@
           </a:ln>
         </p:spPr>
         <p:txBody>
-          <a:bodyPr wrap="square" lIns="0" tIns="0" rIns="0" bIns="0" anchor="ctr" rtlCol="0">
+          <a:bodyPr wrap="square" lIns="0" tIns="0" rIns="0" bIns="0" rtlCol="0" anchor="ctr">
             <a:noAutofit/>
           </a:bodyPr>
           <a:lstStyle/>
@@ -2921,7 +2940,7 @@
           </a:ln>
         </p:spPr>
         <p:txBody>
-          <a:bodyPr wrap="square" lIns="0" tIns="0" rIns="0" bIns="0" anchor="t" rtlCol="0">
+          <a:bodyPr wrap="square" lIns="0" tIns="0" rIns="0" bIns="0" rtlCol="0" anchor="t">
             <a:noAutofit/>
           </a:bodyPr>
           <a:lstStyle/>
@@ -2971,7 +2990,7 @@
           </a:ln>
         </p:spPr>
         <p:txBody>
-          <a:bodyPr wrap="square" lIns="0" tIns="0" rIns="0" bIns="0" anchor="t" rtlCol="0">
+          <a:bodyPr wrap="square" lIns="0" tIns="0" rIns="0" bIns="0" rtlCol="0" anchor="t">
             <a:noAutofit/>
           </a:bodyPr>
           <a:lstStyle/>
@@ -3195,6 +3214,13 @@
             </a:solidFill>
           </a:ln>
         </p:spPr>
+        <p:txBody>
+          <a:bodyPr/>
+          <a:lstStyle/>
+          <a:p>
+            <a:endParaRPr lang="en-IN"/>
+          </a:p>
+        </p:txBody>
       </p:sp>
       <p:sp>
         <p:nvSpPr>
@@ -3216,7 +3242,7 @@
           </a:ln>
         </p:spPr>
         <p:txBody>
-          <a:bodyPr wrap="square" lIns="0" tIns="0" rIns="0" bIns="0" anchor="ctr" rtlCol="0">
+          <a:bodyPr wrap="square" lIns="0" tIns="0" rIns="0" bIns="0" rtlCol="0" anchor="ctr">
             <a:noAutofit/>
           </a:bodyPr>
           <a:lstStyle/>
@@ -3269,6 +3295,13 @@
             </a:solidFill>
           </a:ln>
         </p:spPr>
+        <p:txBody>
+          <a:bodyPr/>
+          <a:lstStyle/>
+          <a:p>
+            <a:endParaRPr lang="en-IN"/>
+          </a:p>
+        </p:txBody>
       </p:sp>
       <p:pic>
         <p:nvPicPr>
@@ -3279,7 +3312,7 @@
           <p:nvPr/>
         </p:nvPicPr>
         <p:blipFill>
-          <a:blip r:embed="rId10"/>
+          <a:blip r:embed="rId3"/>
           <a:stretch>
             <a:fillRect/>
           </a:stretch>
@@ -3339,7 +3372,7 @@
           </a:ln>
         </p:spPr>
         <p:txBody>
-          <a:bodyPr wrap="square" lIns="0" tIns="0" rIns="0" bIns="0" anchor="ctr" rtlCol="0">
+          <a:bodyPr wrap="square" lIns="0" tIns="0" rIns="0" bIns="0" rtlCol="0" anchor="ctr">
             <a:noAutofit/>
           </a:bodyPr>
           <a:lstStyle/>
@@ -3361,7 +3394,7 @@
                 <a:latin typeface="+mj-lt"/>
                 <a:cs typeface="+mj-lt"/>
               </a:rPr>
-              <a:t>Advanced — Is the Mailbox Real?</a:t>
+              <a:t>Advanced : Is the Mailbox Real?</a:t>
             </a:r>
             <a:endParaRPr lang="en-US" sz="2600" dirty="0"/>
           </a:p>
@@ -3387,12 +3420,12 @@
           </a:ln>
         </p:spPr>
         <p:txBody>
-          <a:bodyPr wrap="square" lIns="0" tIns="0" rIns="0" bIns="0" anchor="t" rtlCol="0">
+          <a:bodyPr wrap="square" lIns="0" tIns="0" rIns="0" bIns="0" rtlCol="0" anchor="t">
             <a:noAutofit/>
           </a:bodyPr>
           <a:lstStyle/>
           <a:p>
-            <a:pPr algn="l" marL="228600" indent="-228600">
+            <a:pPr marL="228600" indent="-228600" algn="l">
               <a:spcBef>
                 <a:spcPts val="0"/>
               </a:spcBef>
@@ -3418,7 +3451,7 @@
             <a:endParaRPr lang="en-US" sz="1400" dirty="0"/>
           </a:p>
           <a:p>
-            <a:pPr algn="l" marL="228600" indent="-228600">
+            <a:pPr marL="228600" indent="-228600" algn="l">
               <a:spcBef>
                 <a:spcPts val="0"/>
               </a:spcBef>
@@ -3449,7 +3482,7 @@
                 <a:latin typeface="+mn-lt"/>
                 <a:cs typeface="+mn-lt"/>
               </a:rPr>
-              <a:t> (DNS) checks the domain can receive mail — </a:t>
+              <a:t> (DNS) checks the domain can receive mail : </a:t>
             </a:r>
             <a:r>
               <a:rPr lang="en-US" sz="1302" b="0" i="0" dirty="0">
@@ -3476,7 +3509,7 @@
             <a:endParaRPr lang="en-US" sz="1400" dirty="0"/>
           </a:p>
           <a:p>
-            <a:pPr algn="l" marL="228600" indent="-228600">
+            <a:pPr marL="228600" indent="-228600" algn="l">
               <a:spcBef>
                 <a:spcPts val="0"/>
               </a:spcBef>
@@ -3534,7 +3567,7 @@
             <a:endParaRPr lang="en-US" sz="1400" dirty="0"/>
           </a:p>
           <a:p>
-            <a:pPr algn="l" marL="228600" indent="-228600">
+            <a:pPr marL="228600" indent="-228600" algn="l">
               <a:spcBef>
                 <a:spcPts val="0"/>
               </a:spcBef>
@@ -3644,33 +3677,7 @@
             <a:endParaRPr lang="en-US" sz="1400" dirty="0"/>
           </a:p>
           <a:p>
-            <a:pPr algn="l" marL="228600" indent="-228600">
-              <a:spcBef>
-                <a:spcPts val="0"/>
-              </a:spcBef>
-              <a:spcAft>
-                <a:spcPts val="700"/>
-              </a:spcAft>
-              <a:buClr>
-                <a:schemeClr val="accent2"/>
-              </a:buClr>
-              <a:buFont typeface="Arial"/>
-              <a:buChar char="•"/>
-            </a:pPr>
-            <a:r>
-              <a:rPr lang="en-US" sz="1400" b="0" i="0" dirty="0">
-                <a:solidFill>
-                  <a:schemeClr val="tx2"/>
-                </a:solidFill>
-                <a:latin typeface="+mn-lt"/>
-                <a:cs typeface="+mn-lt"/>
-              </a:rPr>
-              <a:t>Cache results — network checks are slow; never repeat the same lookup.</a:t>
-            </a:r>
-            <a:endParaRPr lang="en-US" sz="1400" dirty="0"/>
-          </a:p>
-          <a:p>
-            <a:pPr algn="l" marL="228600" indent="-228600">
+            <a:pPr marL="228600" indent="-228600" algn="l">
               <a:spcBef>
                 <a:spcPts val="0"/>
               </a:spcBef>
@@ -3743,7 +3750,7 @@
           </a:ln>
         </p:spPr>
         <p:txBody>
-          <a:bodyPr wrap="square" lIns="0" tIns="0" rIns="0" bIns="0" anchor="ctr" rtlCol="0">
+          <a:bodyPr wrap="square" lIns="0" tIns="0" rIns="0" bIns="0" rtlCol="0" anchor="ctr">
             <a:noAutofit/>
           </a:bodyPr>
           <a:lstStyle/>
@@ -3822,7 +3829,7 @@
           </a:ln>
         </p:spPr>
         <p:txBody>
-          <a:bodyPr wrap="square" lIns="0" tIns="0" rIns="0" bIns="0" anchor="ctr" rtlCol="0">
+          <a:bodyPr wrap="square" lIns="0" tIns="0" rIns="0" bIns="0" rtlCol="0" anchor="ctr">
             <a:noAutofit/>
           </a:bodyPr>
           <a:lstStyle/>
@@ -3901,7 +3908,7 @@
           </a:ln>
         </p:spPr>
         <p:txBody>
-          <a:bodyPr wrap="square" lIns="0" tIns="0" rIns="0" bIns="0" anchor="ctr" rtlCol="0">
+          <a:bodyPr wrap="square" lIns="0" tIns="0" rIns="0" bIns="0" rtlCol="0" anchor="ctr">
             <a:noAutofit/>
           </a:bodyPr>
           <a:lstStyle/>
@@ -3998,7 +4005,7 @@
           </a:ln>
         </p:spPr>
         <p:txBody>
-          <a:bodyPr wrap="none" lIns="0" tIns="0" rIns="0" bIns="0" anchor="ctr" rtlCol="0">
+          <a:bodyPr wrap="none" lIns="0" tIns="0" rIns="0" bIns="0" rtlCol="0" anchor="ctr">
             <a:noAutofit/>
           </a:bodyPr>
           <a:lstStyle/>
@@ -4073,7 +4080,7 @@
           </a:ln>
         </p:spPr>
         <p:txBody>
-          <a:bodyPr wrap="none" lIns="0" tIns="0" rIns="0" bIns="0" anchor="ctr" rtlCol="0">
+          <a:bodyPr wrap="none" lIns="0" tIns="0" rIns="0" bIns="0" rtlCol="0" anchor="ctr">
             <a:noAutofit/>
           </a:bodyPr>
           <a:lstStyle/>
@@ -4147,7 +4154,7 @@
           </a:ln>
         </p:spPr>
         <p:txBody>
-          <a:bodyPr wrap="none" lIns="0" tIns="0" rIns="0" bIns="0" anchor="ctr" rtlCol="0">
+          <a:bodyPr wrap="none" lIns="0" tIns="0" rIns="0" bIns="0" rtlCol="0" anchor="ctr">
             <a:noAutofit/>
           </a:bodyPr>
           <a:lstStyle/>
@@ -4222,7 +4229,7 @@
           </a:ln>
         </p:spPr>
         <p:txBody>
-          <a:bodyPr wrap="none" lIns="0" tIns="0" rIns="0" bIns="0" anchor="ctr" rtlCol="0">
+          <a:bodyPr wrap="none" lIns="0" tIns="0" rIns="0" bIns="0" rtlCol="0" anchor="ctr">
             <a:noAutofit/>
           </a:bodyPr>
           <a:lstStyle/>
@@ -4282,7 +4289,7 @@
           </a:ln>
         </p:spPr>
         <p:txBody>
-          <a:bodyPr wrap="square" lIns="137160" tIns="27432" rIns="91440" bIns="27432" anchor="ctr" rtlCol="0">
+          <a:bodyPr wrap="square" lIns="137160" tIns="27432" rIns="91440" bIns="27432" rtlCol="0" anchor="ctr">
             <a:noAutofit/>
           </a:bodyPr>
           <a:lstStyle/>
@@ -4326,7 +4333,7 @@
                 <a:latin typeface="+mn-lt"/>
                 <a:cs typeface="+mn-lt"/>
               </a:rPr>
-              <a:t>Treat as not invalid — never reject on silence.</a:t>
+              <a:t>Treat as not invalid : never reject on silence.</a:t>
             </a:r>
             <a:endParaRPr lang="en-US" sz="1100" dirty="0"/>
           </a:p>
@@ -4352,7 +4359,7 @@
           </a:ln>
         </p:spPr>
         <p:txBody>
-          <a:bodyPr wrap="square" lIns="0" tIns="0" rIns="0" bIns="0" anchor="ctr" rtlCol="0">
+          <a:bodyPr wrap="square" lIns="0" tIns="0" rIns="0" bIns="0" rtlCol="0" anchor="ctr">
             <a:noAutofit/>
           </a:bodyPr>
           <a:lstStyle/>
@@ -4403,7 +4410,7 @@
           </a:ln>
         </p:spPr>
         <p:txBody>
-          <a:bodyPr wrap="square" lIns="0" tIns="0" rIns="0" bIns="0" anchor="ctr" rtlCol="0">
+          <a:bodyPr wrap="square" lIns="0" tIns="0" rIns="0" bIns="0" rtlCol="0" anchor="ctr">
             <a:noAutofit/>
           </a:bodyPr>
           <a:lstStyle/>
@@ -4423,6 +4430,15 @@
               </a:rPr>
               <a:t>10</a:t>
             </a:fld>
+            <a:endParaRPr lang="en-US" sz="1000" dirty="0">
+              <a:solidFill>
+                <a:schemeClr val="tx2">
+                  <a:lumMod val="65000"/>
+                  <a:lumOff val="35000"/>
+                </a:schemeClr>
+              </a:solidFill>
+              <a:latin typeface="+mn-lt"/>
+            </a:endParaRPr>
           </a:p>
         </p:txBody>
       </p:sp>
@@ -4471,7 +4487,7 @@
           </a:ln>
         </p:spPr>
         <p:txBody>
-          <a:bodyPr wrap="square" lIns="0" tIns="0" rIns="0" bIns="0" anchor="ctr" rtlCol="0">
+          <a:bodyPr wrap="square" lIns="0" tIns="0" rIns="0" bIns="0" rtlCol="0" anchor="ctr">
             <a:noAutofit/>
           </a:bodyPr>
           <a:lstStyle/>
@@ -4519,12 +4535,12 @@
           </a:ln>
         </p:spPr>
         <p:txBody>
-          <a:bodyPr wrap="square" lIns="0" tIns="0" rIns="0" bIns="0" anchor="t" rtlCol="0">
+          <a:bodyPr wrap="square" lIns="0" tIns="0" rIns="0" bIns="0" rtlCol="0" anchor="t">
             <a:noAutofit/>
           </a:bodyPr>
           <a:lstStyle/>
           <a:p>
-            <a:pPr algn="l" marL="228600" indent="-228600">
+            <a:pPr marL="228600" indent="-228600" algn="l">
               <a:spcBef>
                 <a:spcPts val="0"/>
               </a:spcBef>
@@ -4594,7 +4610,7 @@
             <a:endParaRPr lang="en-US" sz="1400" dirty="0"/>
           </a:p>
           <a:p>
-            <a:pPr algn="l" marL="228600" indent="-228600">
+            <a:pPr marL="228600" indent="-228600" algn="l">
               <a:spcBef>
                 <a:spcPts val="0"/>
               </a:spcBef>
@@ -4664,7 +4680,7 @@
             <a:endParaRPr lang="en-US" sz="1400" dirty="0"/>
           </a:p>
           <a:p>
-            <a:pPr algn="l" marL="228600" indent="-228600">
+            <a:pPr marL="228600" indent="-228600" algn="l">
               <a:spcBef>
                 <a:spcPts val="0"/>
               </a:spcBef>
@@ -4778,7 +4794,7 @@
             <a:endParaRPr lang="en-US" sz="1400" dirty="0"/>
           </a:p>
           <a:p>
-            <a:pPr algn="l" marL="228600" indent="-228600">
+            <a:pPr marL="228600" indent="-228600" algn="l">
               <a:spcBef>
                 <a:spcPts val="0"/>
               </a:spcBef>
@@ -4804,7 +4820,7 @@
             <a:endParaRPr lang="en-US" sz="1400" dirty="0"/>
           </a:p>
           <a:p>
-            <a:pPr algn="l" marL="228600" indent="-228600">
+            <a:pPr marL="228600" indent="-228600" algn="l">
               <a:spcBef>
                 <a:spcPts val="0"/>
               </a:spcBef>
@@ -4870,7 +4886,7 @@
             <a:endParaRPr lang="en-US" sz="1400" dirty="0"/>
           </a:p>
           <a:p>
-            <a:pPr algn="l" marL="228600" indent="-228600">
+            <a:pPr marL="228600" indent="-228600" algn="l">
               <a:spcBef>
                 <a:spcPts val="0"/>
               </a:spcBef>
@@ -4914,9 +4930,27 @@
             <a:tbl>
               <a:tblPr firstRow="1"/>
               <a:tblGrid>
-                <a:gridCol w="2011680"/>
-                <a:gridCol w="731520"/>
-                <a:gridCol w="2286000"/>
+                <a:gridCol w="2011680">
+                  <a:extLst>
+                    <a:ext uri="{9D8B030D-6E8A-4147-A177-3AD203B41FA5}">
+                      <a16:colId xmlns:a16="http://schemas.microsoft.com/office/drawing/2014/main" val="20000"/>
+                    </a:ext>
+                  </a:extLst>
+                </a:gridCol>
+                <a:gridCol w="731520">
+                  <a:extLst>
+                    <a:ext uri="{9D8B030D-6E8A-4147-A177-3AD203B41FA5}">
+                      <a16:colId xmlns:a16="http://schemas.microsoft.com/office/drawing/2014/main" val="20001"/>
+                    </a:ext>
+                  </a:extLst>
+                </a:gridCol>
+                <a:gridCol w="2286000">
+                  <a:extLst>
+                    <a:ext uri="{9D8B030D-6E8A-4147-A177-3AD203B41FA5}">
+                      <a16:colId xmlns:a16="http://schemas.microsoft.com/office/drawing/2014/main" val="20002"/>
+                    </a:ext>
+                  </a:extLst>
+                </a:gridCol>
               </a:tblGrid>
               <a:tr h="384048">
                 <a:tc>
@@ -4946,7 +4980,7 @@
                       <a:endParaRPr lang="en-US" sz="1200" dirty="0"/>
                     </a:p>
                   </a:txBody>
-                  <a:tcPr marL="91440" marR="73152" marT="36576" marB="36576" anchor="ctr">
+                  <a:tcPr marR="73152" marT="36576" marB="36576" anchor="ctr">
                     <a:lnL w="0">
                       <a:noFill/>
                     </a:lnL>
@@ -4997,7 +5031,7 @@
                       <a:endParaRPr lang="en-US" sz="1200" dirty="0"/>
                     </a:p>
                   </a:txBody>
-                  <a:tcPr marL="91440" marR="73152" marT="36576" marB="36576" anchor="ctr">
+                  <a:tcPr marR="73152" marT="36576" marB="36576" anchor="ctr">
                     <a:lnL w="0">
                       <a:noFill/>
                     </a:lnL>
@@ -5048,7 +5082,7 @@
                       <a:endParaRPr lang="en-US" sz="1200" dirty="0"/>
                     </a:p>
                   </a:txBody>
-                  <a:tcPr marL="91440" marR="73152" marT="36576" marB="36576" anchor="ctr">
+                  <a:tcPr marR="73152" marT="36576" marB="36576" anchor="ctr">
                     <a:lnL w="0">
                       <a:noFill/>
                     </a:lnL>
@@ -5072,6 +5106,11 @@
                     </a:solidFill>
                   </a:tcPr>
                 </a:tc>
+                <a:extLst>
+                  <a:ext uri="{0D108BD9-81ED-4DB2-BD59-A6C34878D82A}">
+                    <a16:rowId xmlns:a16="http://schemas.microsoft.com/office/drawing/2014/main" val="10000"/>
+                  </a:ext>
+                </a:extLst>
               </a:tr>
               <a:tr h="420624">
                 <a:tc>
@@ -5101,7 +5140,7 @@
                       <a:endParaRPr lang="en-US" sz="1100" dirty="0"/>
                     </a:p>
                   </a:txBody>
-                  <a:tcPr marL="91440" marR="73152" marT="36576" marB="36576" anchor="ctr">
+                  <a:tcPr marR="73152" marT="36576" marB="36576" anchor="ctr">
                     <a:lnL w="0">
                       <a:noFill/>
                     </a:lnL>
@@ -5155,7 +5194,7 @@
                       <a:endParaRPr lang="en-US" sz="1100" dirty="0"/>
                     </a:p>
                   </a:txBody>
-                  <a:tcPr marL="91440" marR="73152" marT="36576" marB="36576" anchor="ctr">
+                  <a:tcPr marR="73152" marT="36576" marB="36576" anchor="ctr">
                     <a:lnL w="0">
                       <a:noFill/>
                     </a:lnL>
@@ -5207,7 +5246,7 @@
                       <a:endParaRPr lang="en-US" sz="1100" dirty="0"/>
                     </a:p>
                   </a:txBody>
-                  <a:tcPr marL="91440" marR="73152" marT="36576" marB="36576" anchor="ctr">
+                  <a:tcPr marR="73152" marT="36576" marB="36576" anchor="ctr">
                     <a:lnL w="0">
                       <a:noFill/>
                     </a:lnL>
@@ -5232,6 +5271,11 @@
                     </a:solidFill>
                   </a:tcPr>
                 </a:tc>
+                <a:extLst>
+                  <a:ext uri="{0D108BD9-81ED-4DB2-BD59-A6C34878D82A}">
+                    <a16:rowId xmlns:a16="http://schemas.microsoft.com/office/drawing/2014/main" val="10001"/>
+                  </a:ext>
+                </a:extLst>
               </a:tr>
               <a:tr h="420624">
                 <a:tc>
@@ -5261,7 +5305,7 @@
                       <a:endParaRPr lang="en-US" sz="1100" dirty="0"/>
                     </a:p>
                   </a:txBody>
-                  <a:tcPr marL="91440" marR="73152" marT="36576" marB="36576" anchor="ctr">
+                  <a:tcPr marR="73152" marT="36576" marB="36576" anchor="ctr">
                     <a:lnL w="0">
                       <a:noFill/>
                     </a:lnL>
@@ -5315,7 +5359,7 @@
                       <a:endParaRPr lang="en-US" sz="1100" dirty="0"/>
                     </a:p>
                   </a:txBody>
-                  <a:tcPr marL="91440" marR="73152" marT="36576" marB="36576" anchor="ctr">
+                  <a:tcPr marR="73152" marT="36576" marB="36576" anchor="ctr">
                     <a:lnL w="0">
                       <a:noFill/>
                     </a:lnL>
@@ -5367,7 +5411,7 @@
                       <a:endParaRPr lang="en-US" sz="1100" dirty="0"/>
                     </a:p>
                   </a:txBody>
-                  <a:tcPr marL="91440" marR="73152" marT="36576" marB="36576" anchor="ctr">
+                  <a:tcPr marR="73152" marT="36576" marB="36576" anchor="ctr">
                     <a:lnL w="0">
                       <a:noFill/>
                     </a:lnL>
@@ -5392,6 +5436,11 @@
                     </a:solidFill>
                   </a:tcPr>
                 </a:tc>
+                <a:extLst>
+                  <a:ext uri="{0D108BD9-81ED-4DB2-BD59-A6C34878D82A}">
+                    <a16:rowId xmlns:a16="http://schemas.microsoft.com/office/drawing/2014/main" val="10002"/>
+                  </a:ext>
+                </a:extLst>
               </a:tr>
               <a:tr h="420624">
                 <a:tc>
@@ -5421,7 +5470,7 @@
                       <a:endParaRPr lang="en-US" sz="1100" dirty="0"/>
                     </a:p>
                   </a:txBody>
-                  <a:tcPr marL="91440" marR="73152" marT="36576" marB="36576" anchor="ctr">
+                  <a:tcPr marR="73152" marT="36576" marB="36576" anchor="ctr">
                     <a:lnL w="0">
                       <a:noFill/>
                     </a:lnL>
@@ -5475,7 +5524,7 @@
                       <a:endParaRPr lang="en-US" sz="1100" dirty="0"/>
                     </a:p>
                   </a:txBody>
-                  <a:tcPr marL="91440" marR="73152" marT="36576" marB="36576" anchor="ctr">
+                  <a:tcPr marR="73152" marT="36576" marB="36576" anchor="ctr">
                     <a:lnL w="0">
                       <a:noFill/>
                     </a:lnL>
@@ -5527,7 +5576,7 @@
                       <a:endParaRPr lang="en-US" sz="1100" dirty="0"/>
                     </a:p>
                   </a:txBody>
-                  <a:tcPr marL="91440" marR="73152" marT="36576" marB="36576" anchor="ctr">
+                  <a:tcPr marR="73152" marT="36576" marB="36576" anchor="ctr">
                     <a:lnL w="0">
                       <a:noFill/>
                     </a:lnL>
@@ -5552,6 +5601,11 @@
                     </a:solidFill>
                   </a:tcPr>
                 </a:tc>
+                <a:extLst>
+                  <a:ext uri="{0D108BD9-81ED-4DB2-BD59-A6C34878D82A}">
+                    <a16:rowId xmlns:a16="http://schemas.microsoft.com/office/drawing/2014/main" val="10003"/>
+                  </a:ext>
+                </a:extLst>
               </a:tr>
               <a:tr h="420624">
                 <a:tc>
@@ -5581,7 +5635,7 @@
                       <a:endParaRPr lang="en-US" sz="1100" dirty="0"/>
                     </a:p>
                   </a:txBody>
-                  <a:tcPr marL="91440" marR="73152" marT="36576" marB="36576" anchor="ctr">
+                  <a:tcPr marR="73152" marT="36576" marB="36576" anchor="ctr">
                     <a:lnL w="0">
                       <a:noFill/>
                     </a:lnL>
@@ -5635,7 +5689,7 @@
                       <a:endParaRPr lang="en-US" sz="1100" dirty="0"/>
                     </a:p>
                   </a:txBody>
-                  <a:tcPr marL="91440" marR="73152" marT="36576" marB="36576" anchor="ctr">
+                  <a:tcPr marR="73152" marT="36576" marB="36576" anchor="ctr">
                     <a:lnL w="0">
                       <a:noFill/>
                     </a:lnL>
@@ -5687,7 +5741,7 @@
                       <a:endParaRPr lang="en-US" sz="1100" dirty="0"/>
                     </a:p>
                   </a:txBody>
-                  <a:tcPr marL="91440" marR="73152" marT="36576" marB="36576" anchor="ctr">
+                  <a:tcPr marR="73152" marT="36576" marB="36576" anchor="ctr">
                     <a:lnL w="0">
                       <a:noFill/>
                     </a:lnL>
@@ -5712,6 +5766,11 @@
                     </a:solidFill>
                   </a:tcPr>
                 </a:tc>
+                <a:extLst>
+                  <a:ext uri="{0D108BD9-81ED-4DB2-BD59-A6C34878D82A}">
+                    <a16:rowId xmlns:a16="http://schemas.microsoft.com/office/drawing/2014/main" val="10004"/>
+                  </a:ext>
+                </a:extLst>
               </a:tr>
               <a:tr h="420624">
                 <a:tc>
@@ -5741,7 +5800,7 @@
                       <a:endParaRPr lang="en-US" sz="1100" dirty="0"/>
                     </a:p>
                   </a:txBody>
-                  <a:tcPr marL="91440" marR="73152" marT="36576" marB="36576" anchor="ctr">
+                  <a:tcPr marR="73152" marT="36576" marB="36576" anchor="ctr">
                     <a:lnL w="0">
                       <a:noFill/>
                     </a:lnL>
@@ -5795,7 +5854,7 @@
                       <a:endParaRPr lang="en-US" sz="1100" dirty="0"/>
                     </a:p>
                   </a:txBody>
-                  <a:tcPr marL="91440" marR="73152" marT="36576" marB="36576" anchor="ctr">
+                  <a:tcPr marR="73152" marT="36576" marB="36576" anchor="ctr">
                     <a:lnL w="0">
                       <a:noFill/>
                     </a:lnL>
@@ -5847,7 +5906,7 @@
                       <a:endParaRPr lang="en-US" sz="1100" dirty="0"/>
                     </a:p>
                   </a:txBody>
-                  <a:tcPr marL="91440" marR="73152" marT="36576" marB="36576" anchor="ctr">
+                  <a:tcPr marR="73152" marT="36576" marB="36576" anchor="ctr">
                     <a:lnL w="0">
                       <a:noFill/>
                     </a:lnL>
@@ -5872,6 +5931,11 @@
                     </a:solidFill>
                   </a:tcPr>
                 </a:tc>
+                <a:extLst>
+                  <a:ext uri="{0D108BD9-81ED-4DB2-BD59-A6C34878D82A}">
+                    <a16:rowId xmlns:a16="http://schemas.microsoft.com/office/drawing/2014/main" val="10005"/>
+                  </a:ext>
+                </a:extLst>
               </a:tr>
               <a:tr h="420624">
                 <a:tc>
@@ -5901,7 +5965,7 @@
                       <a:endParaRPr lang="en-US" sz="1100" dirty="0"/>
                     </a:p>
                   </a:txBody>
-                  <a:tcPr marL="91440" marR="73152" marT="36576" marB="36576" anchor="ctr">
+                  <a:tcPr marR="73152" marT="36576" marB="36576" anchor="ctr">
                     <a:lnL w="0">
                       <a:noFill/>
                     </a:lnL>
@@ -5955,7 +6019,7 @@
                       <a:endParaRPr lang="en-US" sz="1100" dirty="0"/>
                     </a:p>
                   </a:txBody>
-                  <a:tcPr marL="91440" marR="73152" marT="36576" marB="36576" anchor="ctr">
+                  <a:tcPr marR="73152" marT="36576" marB="36576" anchor="ctr">
                     <a:lnL w="0">
                       <a:noFill/>
                     </a:lnL>
@@ -6007,7 +6071,7 @@
                       <a:endParaRPr lang="en-US" sz="1100" dirty="0"/>
                     </a:p>
                   </a:txBody>
-                  <a:tcPr marL="91440" marR="73152" marT="36576" marB="36576" anchor="ctr">
+                  <a:tcPr marR="73152" marT="36576" marB="36576" anchor="ctr">
                     <a:lnL w="0">
                       <a:noFill/>
                     </a:lnL>
@@ -6032,6 +6096,11 @@
                     </a:solidFill>
                   </a:tcPr>
                 </a:tc>
+                <a:extLst>
+                  <a:ext uri="{0D108BD9-81ED-4DB2-BD59-A6C34878D82A}">
+                    <a16:rowId xmlns:a16="http://schemas.microsoft.com/office/drawing/2014/main" val="10006"/>
+                  </a:ext>
+                </a:extLst>
               </a:tr>
               <a:tr h="420624">
                 <a:tc>
@@ -6061,7 +6130,7 @@
                       <a:endParaRPr lang="en-US" sz="1100" dirty="0"/>
                     </a:p>
                   </a:txBody>
-                  <a:tcPr marL="91440" marR="73152" marT="36576" marB="36576" anchor="ctr">
+                  <a:tcPr marR="73152" marT="36576" marB="36576" anchor="ctr">
                     <a:lnL w="0">
                       <a:noFill/>
                     </a:lnL>
@@ -6115,7 +6184,7 @@
                       <a:endParaRPr lang="en-US" sz="1100" dirty="0"/>
                     </a:p>
                   </a:txBody>
-                  <a:tcPr marL="91440" marR="73152" marT="36576" marB="36576" anchor="ctr">
+                  <a:tcPr marR="73152" marT="36576" marB="36576" anchor="ctr">
                     <a:lnL w="0">
                       <a:noFill/>
                     </a:lnL>
@@ -6167,7 +6236,7 @@
                       <a:endParaRPr lang="en-US" sz="1100" dirty="0"/>
                     </a:p>
                   </a:txBody>
-                  <a:tcPr marL="91440" marR="73152" marT="36576" marB="36576" anchor="ctr">
+                  <a:tcPr marR="73152" marT="36576" marB="36576" anchor="ctr">
                     <a:lnL w="0">
                       <a:noFill/>
                     </a:lnL>
@@ -6192,6 +6261,11 @@
                     </a:solidFill>
                   </a:tcPr>
                 </a:tc>
+                <a:extLst>
+                  <a:ext uri="{0D108BD9-81ED-4DB2-BD59-A6C34878D82A}">
+                    <a16:rowId xmlns:a16="http://schemas.microsoft.com/office/drawing/2014/main" val="10007"/>
+                  </a:ext>
+                </a:extLst>
               </a:tr>
               <a:tr h="420624">
                 <a:tc>
@@ -6221,7 +6295,7 @@
                       <a:endParaRPr lang="en-US" sz="1100" dirty="0"/>
                     </a:p>
                   </a:txBody>
-                  <a:tcPr marL="91440" marR="73152" marT="36576" marB="36576" anchor="ctr">
+                  <a:tcPr marR="73152" marT="36576" marB="36576" anchor="ctr">
                     <a:lnL w="0">
                       <a:noFill/>
                     </a:lnL>
@@ -6275,7 +6349,7 @@
                       <a:endParaRPr lang="en-US" sz="1100" dirty="0"/>
                     </a:p>
                   </a:txBody>
-                  <a:tcPr marL="91440" marR="73152" marT="36576" marB="36576" anchor="ctr">
+                  <a:tcPr marR="73152" marT="36576" marB="36576" anchor="ctr">
                     <a:lnL w="0">
                       <a:noFill/>
                     </a:lnL>
@@ -6327,7 +6401,7 @@
                       <a:endParaRPr lang="en-US" sz="1100" dirty="0"/>
                     </a:p>
                   </a:txBody>
-                  <a:tcPr marL="91440" marR="73152" marT="36576" marB="36576" anchor="ctr">
+                  <a:tcPr marR="73152" marT="36576" marB="36576" anchor="ctr">
                     <a:lnL w="0">
                       <a:noFill/>
                     </a:lnL>
@@ -6352,6 +6426,11 @@
                     </a:solidFill>
                   </a:tcPr>
                 </a:tc>
+                <a:extLst>
+                  <a:ext uri="{0D108BD9-81ED-4DB2-BD59-A6C34878D82A}">
+                    <a16:rowId xmlns:a16="http://schemas.microsoft.com/office/drawing/2014/main" val="10008"/>
+                  </a:ext>
+                </a:extLst>
               </a:tr>
             </a:tbl>
           </a:graphicData>
@@ -6377,7 +6456,7 @@
           </a:ln>
         </p:spPr>
         <p:txBody>
-          <a:bodyPr wrap="square" lIns="0" tIns="0" rIns="0" bIns="0" anchor="t" rtlCol="0">
+          <a:bodyPr wrap="square" lIns="0" tIns="0" rIns="0" bIns="0" rtlCol="0" anchor="t">
             <a:noAutofit/>
           </a:bodyPr>
           <a:lstStyle/>
@@ -6428,7 +6507,7 @@
           </a:ln>
         </p:spPr>
         <p:txBody>
-          <a:bodyPr wrap="square" lIns="0" tIns="0" rIns="0" bIns="0" anchor="ctr" rtlCol="0">
+          <a:bodyPr wrap="square" lIns="0" tIns="0" rIns="0" bIns="0" rtlCol="0" anchor="ctr">
             <a:noAutofit/>
           </a:bodyPr>
           <a:lstStyle/>
@@ -6479,7 +6558,7 @@
           </a:ln>
         </p:spPr>
         <p:txBody>
-          <a:bodyPr wrap="square" lIns="0" tIns="0" rIns="0" bIns="0" anchor="ctr" rtlCol="0">
+          <a:bodyPr wrap="square" lIns="0" tIns="0" rIns="0" bIns="0" rtlCol="0" anchor="ctr">
             <a:noAutofit/>
           </a:bodyPr>
           <a:lstStyle/>
@@ -6499,6 +6578,15 @@
               </a:rPr>
               <a:t>11</a:t>
             </a:fld>
+            <a:endParaRPr lang="en-US" sz="1000" dirty="0">
+              <a:solidFill>
+                <a:schemeClr val="tx2">
+                  <a:lumMod val="65000"/>
+                  <a:lumOff val="35000"/>
+                </a:schemeClr>
+              </a:solidFill>
+              <a:latin typeface="+mn-lt"/>
+            </a:endParaRPr>
           </a:p>
         </p:txBody>
       </p:sp>
@@ -6547,7 +6635,7 @@
           </a:ln>
         </p:spPr>
         <p:txBody>
-          <a:bodyPr wrap="square" lIns="0" tIns="0" rIns="0" bIns="0" anchor="ctr" rtlCol="0">
+          <a:bodyPr wrap="square" lIns="0" tIns="0" rIns="0" bIns="0" rtlCol="0" anchor="ctr">
             <a:noAutofit/>
           </a:bodyPr>
           <a:lstStyle/>
@@ -6595,12 +6683,12 @@
           </a:ln>
         </p:spPr>
         <p:txBody>
-          <a:bodyPr wrap="square" lIns="0" tIns="0" rIns="0" bIns="0" anchor="t" rtlCol="0">
+          <a:bodyPr wrap="square" lIns="0" tIns="0" rIns="0" bIns="0" rtlCol="0" anchor="t">
             <a:noAutofit/>
           </a:bodyPr>
           <a:lstStyle/>
           <a:p>
-            <a:pPr algn="l" marL="228600" indent="-228600">
+            <a:pPr marL="228600" indent="-228600" algn="l">
               <a:spcBef>
                 <a:spcPts val="0"/>
               </a:spcBef>
@@ -6636,7 +6724,7 @@
             <a:endParaRPr lang="en-US" sz="1400" dirty="0"/>
           </a:p>
           <a:p>
-            <a:pPr algn="l" marL="228600" indent="-228600">
+            <a:pPr marL="228600" indent="-228600" algn="l">
               <a:spcBef>
                 <a:spcPts val="0"/>
               </a:spcBef>
@@ -6662,7 +6750,7 @@
             <a:endParaRPr lang="en-US" sz="1400" dirty="0"/>
           </a:p>
           <a:p>
-            <a:pPr algn="l" marL="228600" indent="-228600">
+            <a:pPr marL="228600" indent="-228600" algn="l">
               <a:spcBef>
                 <a:spcPts val="0"/>
               </a:spcBef>
@@ -6698,7 +6786,7 @@
             <a:endParaRPr lang="en-US" sz="1400" dirty="0"/>
           </a:p>
           <a:p>
-            <a:pPr algn="l" marL="228600" indent="-228600">
+            <a:pPr marL="228600" indent="-228600" algn="l">
               <a:spcBef>
                 <a:spcPts val="0"/>
               </a:spcBef>
@@ -6719,12 +6807,12 @@
                 <a:latin typeface="+mn-lt"/>
                 <a:cs typeface="+mn-lt"/>
               </a:rPr>
-              <a:t>Over-strict rules reject legitimate addresses — keep the pattern reasonable.</a:t>
+              <a:t>Over-strict rules reject legitimate addresses : keep the pattern reasonable.</a:t>
             </a:r>
             <a:endParaRPr lang="en-US" sz="1400" dirty="0"/>
           </a:p>
           <a:p>
-            <a:pPr algn="l" marL="228600" indent="-228600">
+            <a:pPr marL="228600" indent="-228600" algn="l">
               <a:spcBef>
                 <a:spcPts val="0"/>
               </a:spcBef>
@@ -6750,7 +6838,7 @@
             <a:endParaRPr lang="en-US" sz="1400" dirty="0"/>
           </a:p>
           <a:p>
-            <a:pPr algn="l" marL="228600" indent="-228600">
+            <a:pPr marL="228600" indent="-228600" algn="l">
               <a:spcBef>
                 <a:spcPts val="0"/>
               </a:spcBef>
@@ -6771,7 +6859,7 @@
                 <a:latin typeface="+mn-lt"/>
                 <a:cs typeface="+mn-lt"/>
               </a:rPr>
-              <a:t>Privacy: an address is personal data — handle and store it responsibly.</a:t>
+              <a:t>Privacy: an address is personal data : handle and store it responsibly.</a:t>
             </a:r>
             <a:endParaRPr lang="en-US" sz="1400" dirty="0"/>
           </a:p>
@@ -6803,6 +6891,13 @@
             <a:noFill/>
           </a:ln>
         </p:spPr>
+        <p:txBody>
+          <a:bodyPr/>
+          <a:lstStyle/>
+          <a:p>
+            <a:endParaRPr lang="en-IN"/>
+          </a:p>
+        </p:txBody>
       </p:sp>
       <p:sp>
         <p:nvSpPr>
@@ -6825,6 +6920,13 @@
             <a:noFill/>
           </a:ln>
         </p:spPr>
+        <p:txBody>
+          <a:bodyPr/>
+          <a:lstStyle/>
+          <a:p>
+            <a:endParaRPr lang="en-IN"/>
+          </a:p>
+        </p:txBody>
       </p:sp>
       <p:pic>
         <p:nvPicPr>
@@ -6835,7 +6937,7 @@
           <p:nvPr/>
         </p:nvPicPr>
         <p:blipFill>
-          <a:blip r:embed="rId10"/>
+          <a:blip r:embed="rId3"/>
           <a:stretch>
             <a:fillRect/>
           </a:stretch>
@@ -6870,7 +6972,7 @@
           </a:ln>
         </p:spPr>
         <p:txBody>
-          <a:bodyPr wrap="square" lIns="0" tIns="0" rIns="0" bIns="0" anchor="ctr" rtlCol="0">
+          <a:bodyPr wrap="square" lIns="0" tIns="0" rIns="0" bIns="0" rtlCol="0" anchor="ctr">
             <a:noAutofit/>
           </a:bodyPr>
           <a:lstStyle/>
@@ -6924,6 +7026,13 @@
             <a:noFill/>
           </a:ln>
         </p:spPr>
+        <p:txBody>
+          <a:bodyPr/>
+          <a:lstStyle/>
+          <a:p>
+            <a:endParaRPr lang="en-IN"/>
+          </a:p>
+        </p:txBody>
       </p:sp>
       <p:sp>
         <p:nvSpPr>
@@ -6946,6 +7055,13 @@
             <a:noFill/>
           </a:ln>
         </p:spPr>
+        <p:txBody>
+          <a:bodyPr/>
+          <a:lstStyle/>
+          <a:p>
+            <a:endParaRPr lang="en-IN"/>
+          </a:p>
+        </p:txBody>
       </p:sp>
       <p:pic>
         <p:nvPicPr>
@@ -6956,7 +7072,7 @@
           <p:nvPr/>
         </p:nvPicPr>
         <p:blipFill>
-          <a:blip r:embed="rId11"/>
+          <a:blip r:embed="rId4"/>
           <a:stretch>
             <a:fillRect/>
           </a:stretch>
@@ -6991,7 +7107,7 @@
           </a:ln>
         </p:spPr>
         <p:txBody>
-          <a:bodyPr wrap="square" lIns="0" tIns="0" rIns="0" bIns="0" anchor="ctr" rtlCol="0">
+          <a:bodyPr wrap="square" lIns="0" tIns="0" rIns="0" bIns="0" rtlCol="0" anchor="ctr">
             <a:noAutofit/>
           </a:bodyPr>
           <a:lstStyle/>
@@ -7045,6 +7161,13 @@
             <a:noFill/>
           </a:ln>
         </p:spPr>
+        <p:txBody>
+          <a:bodyPr/>
+          <a:lstStyle/>
+          <a:p>
+            <a:endParaRPr lang="en-IN"/>
+          </a:p>
+        </p:txBody>
       </p:sp>
       <p:sp>
         <p:nvSpPr>
@@ -7067,6 +7190,13 @@
             <a:noFill/>
           </a:ln>
         </p:spPr>
+        <p:txBody>
+          <a:bodyPr/>
+          <a:lstStyle/>
+          <a:p>
+            <a:endParaRPr lang="en-IN"/>
+          </a:p>
+        </p:txBody>
       </p:sp>
       <p:pic>
         <p:nvPicPr>
@@ -7077,7 +7207,7 @@
           <p:nvPr/>
         </p:nvPicPr>
         <p:blipFill>
-          <a:blip r:embed="rId12"/>
+          <a:blip r:embed="rId5"/>
           <a:stretch>
             <a:fillRect/>
           </a:stretch>
@@ -7112,7 +7242,7 @@
           </a:ln>
         </p:spPr>
         <p:txBody>
-          <a:bodyPr wrap="square" lIns="0" tIns="0" rIns="0" bIns="0" anchor="ctr" rtlCol="0">
+          <a:bodyPr wrap="square" lIns="0" tIns="0" rIns="0" bIns="0" rtlCol="0" anchor="ctr">
             <a:noAutofit/>
           </a:bodyPr>
           <a:lstStyle/>
@@ -7166,6 +7296,13 @@
             <a:noFill/>
           </a:ln>
         </p:spPr>
+        <p:txBody>
+          <a:bodyPr/>
+          <a:lstStyle/>
+          <a:p>
+            <a:endParaRPr lang="en-IN"/>
+          </a:p>
+        </p:txBody>
       </p:sp>
       <p:sp>
         <p:nvSpPr>
@@ -7188,6 +7325,13 @@
             <a:noFill/>
           </a:ln>
         </p:spPr>
+        <p:txBody>
+          <a:bodyPr/>
+          <a:lstStyle/>
+          <a:p>
+            <a:endParaRPr lang="en-IN"/>
+          </a:p>
+        </p:txBody>
       </p:sp>
       <p:pic>
         <p:nvPicPr>
@@ -7198,7 +7342,7 @@
           <p:nvPr/>
         </p:nvPicPr>
         <p:blipFill>
-          <a:blip r:embed="rId13"/>
+          <a:blip r:embed="rId6"/>
           <a:stretch>
             <a:fillRect/>
           </a:stretch>
@@ -7233,7 +7377,7 @@
           </a:ln>
         </p:spPr>
         <p:txBody>
-          <a:bodyPr wrap="square" lIns="0" tIns="0" rIns="0" bIns="0" anchor="ctr" rtlCol="0">
+          <a:bodyPr wrap="square" lIns="0" tIns="0" rIns="0" bIns="0" rtlCol="0" anchor="ctr">
             <a:noAutofit/>
           </a:bodyPr>
           <a:lstStyle/>
@@ -7290,7 +7434,7 @@
           </a:ln>
         </p:spPr>
         <p:txBody>
-          <a:bodyPr wrap="square" lIns="182880" tIns="45720" rIns="91440" bIns="45720" anchor="ctr" rtlCol="0">
+          <a:bodyPr wrap="square" lIns="182880" tIns="45720" rIns="91440" bIns="45720" rtlCol="0" anchor="ctr">
             <a:noAutofit/>
           </a:bodyPr>
           <a:lstStyle/>
@@ -7404,7 +7548,7 @@
           </a:ln>
         </p:spPr>
         <p:txBody>
-          <a:bodyPr wrap="square" lIns="0" tIns="0" rIns="0" bIns="0" anchor="ctr" rtlCol="0">
+          <a:bodyPr wrap="square" lIns="0" tIns="0" rIns="0" bIns="0" rtlCol="0" anchor="ctr">
             <a:noAutofit/>
           </a:bodyPr>
           <a:lstStyle/>
@@ -7455,7 +7599,7 @@
           </a:ln>
         </p:spPr>
         <p:txBody>
-          <a:bodyPr wrap="square" lIns="0" tIns="0" rIns="0" bIns="0" anchor="ctr" rtlCol="0">
+          <a:bodyPr wrap="square" lIns="0" tIns="0" rIns="0" bIns="0" rtlCol="0" anchor="ctr">
             <a:noAutofit/>
           </a:bodyPr>
           <a:lstStyle/>
@@ -7475,6 +7619,15 @@
               </a:rPr>
               <a:t>12</a:t>
             </a:fld>
+            <a:endParaRPr lang="en-US" sz="1000" dirty="0">
+              <a:solidFill>
+                <a:schemeClr val="tx2">
+                  <a:lumMod val="65000"/>
+                  <a:lumOff val="35000"/>
+                </a:schemeClr>
+              </a:solidFill>
+              <a:latin typeface="+mn-lt"/>
+            </a:endParaRPr>
           </a:p>
         </p:txBody>
       </p:sp>
@@ -7523,7 +7676,7 @@
           </a:ln>
         </p:spPr>
         <p:txBody>
-          <a:bodyPr wrap="square" lIns="0" tIns="0" rIns="0" bIns="0" anchor="ctr" rtlCol="0">
+          <a:bodyPr wrap="square" lIns="0" tIns="0" rIns="0" bIns="0" rtlCol="0" anchor="ctr">
             <a:noAutofit/>
           </a:bodyPr>
           <a:lstStyle/>
@@ -7577,6 +7730,13 @@
             <a:noFill/>
           </a:ln>
         </p:spPr>
+        <p:txBody>
+          <a:bodyPr/>
+          <a:lstStyle/>
+          <a:p>
+            <a:endParaRPr lang="en-IN"/>
+          </a:p>
+        </p:txBody>
       </p:sp>
       <p:sp>
         <p:nvSpPr>
@@ -7599,6 +7759,13 @@
             <a:noFill/>
           </a:ln>
         </p:spPr>
+        <p:txBody>
+          <a:bodyPr/>
+          <a:lstStyle/>
+          <a:p>
+            <a:endParaRPr lang="en-IN"/>
+          </a:p>
+        </p:txBody>
       </p:sp>
       <p:pic>
         <p:nvPicPr>
@@ -7609,7 +7776,7 @@
           <p:nvPr/>
         </p:nvPicPr>
         <p:blipFill>
-          <a:blip r:embed="rId10"/>
+          <a:blip r:embed="rId3"/>
           <a:stretch>
             <a:fillRect/>
           </a:stretch>
@@ -7644,7 +7811,7 @@
           </a:ln>
         </p:spPr>
         <p:txBody>
-          <a:bodyPr wrap="square" lIns="0" tIns="0" rIns="0" bIns="0" anchor="ctr" rtlCol="0">
+          <a:bodyPr wrap="square" lIns="0" tIns="0" rIns="0" bIns="0" rtlCol="0" anchor="ctr">
             <a:noAutofit/>
           </a:bodyPr>
           <a:lstStyle/>
@@ -7676,7 +7843,7 @@
                 <a:latin typeface="+mn-lt"/>
                 <a:cs typeface="+mn-lt"/>
               </a:rPr>
-              <a:t> — cheap first, network last; fail fast.</a:t>
+              <a:t> : cheap first, network last; fail fast.</a:t>
             </a:r>
             <a:endParaRPr lang="en-US" sz="1400" dirty="0"/>
           </a:p>
@@ -7708,6 +7875,13 @@
             <a:noFill/>
           </a:ln>
         </p:spPr>
+        <p:txBody>
+          <a:bodyPr/>
+          <a:lstStyle/>
+          <a:p>
+            <a:endParaRPr lang="en-IN"/>
+          </a:p>
+        </p:txBody>
       </p:sp>
       <p:sp>
         <p:nvSpPr>
@@ -7730,6 +7904,13 @@
             <a:noFill/>
           </a:ln>
         </p:spPr>
+        <p:txBody>
+          <a:bodyPr/>
+          <a:lstStyle/>
+          <a:p>
+            <a:endParaRPr lang="en-IN"/>
+          </a:p>
+        </p:txBody>
       </p:sp>
       <p:pic>
         <p:nvPicPr>
@@ -7740,7 +7921,7 @@
           <p:nvPr/>
         </p:nvPicPr>
         <p:blipFill>
-          <a:blip r:embed="rId11"/>
+          <a:blip r:embed="rId3"/>
           <a:stretch>
             <a:fillRect/>
           </a:stretch>
@@ -7775,7 +7956,7 @@
           </a:ln>
         </p:spPr>
         <p:txBody>
-          <a:bodyPr wrap="square" lIns="0" tIns="0" rIns="0" bIns="0" anchor="ctr" rtlCol="0">
+          <a:bodyPr wrap="square" lIns="0" tIns="0" rIns="0" bIns="0" rtlCol="0" anchor="ctr">
             <a:noAutofit/>
           </a:bodyPr>
           <a:lstStyle/>
@@ -7851,6 +8032,13 @@
             <a:noFill/>
           </a:ln>
         </p:spPr>
+        <p:txBody>
+          <a:bodyPr/>
+          <a:lstStyle/>
+          <a:p>
+            <a:endParaRPr lang="en-IN"/>
+          </a:p>
+        </p:txBody>
       </p:sp>
       <p:sp>
         <p:nvSpPr>
@@ -7873,6 +8061,13 @@
             <a:noFill/>
           </a:ln>
         </p:spPr>
+        <p:txBody>
+          <a:bodyPr/>
+          <a:lstStyle/>
+          <a:p>
+            <a:endParaRPr lang="en-IN"/>
+          </a:p>
+        </p:txBody>
       </p:sp>
       <p:pic>
         <p:nvPicPr>
@@ -7883,7 +8078,7 @@
           <p:nvPr/>
         </p:nvPicPr>
         <p:blipFill>
-          <a:blip r:embed="rId12"/>
+          <a:blip r:embed="rId3"/>
           <a:stretch>
             <a:fillRect/>
           </a:stretch>
@@ -7918,7 +8113,7 @@
           </a:ln>
         </p:spPr>
         <p:txBody>
-          <a:bodyPr wrap="square" lIns="0" tIns="0" rIns="0" bIns="0" anchor="ctr" rtlCol="0">
+          <a:bodyPr wrap="square" lIns="0" tIns="0" rIns="0" bIns="0" rtlCol="0" anchor="ctr">
             <a:noAutofit/>
           </a:bodyPr>
           <a:lstStyle/>
@@ -7992,6 +8187,13 @@
             <a:noFill/>
           </a:ln>
         </p:spPr>
+        <p:txBody>
+          <a:bodyPr/>
+          <a:lstStyle/>
+          <a:p>
+            <a:endParaRPr lang="en-IN"/>
+          </a:p>
+        </p:txBody>
       </p:sp>
       <p:sp>
         <p:nvSpPr>
@@ -8014,6 +8216,13 @@
             <a:noFill/>
           </a:ln>
         </p:spPr>
+        <p:txBody>
+          <a:bodyPr/>
+          <a:lstStyle/>
+          <a:p>
+            <a:endParaRPr lang="en-IN"/>
+          </a:p>
+        </p:txBody>
       </p:sp>
       <p:pic>
         <p:nvPicPr>
@@ -8024,7 +8233,7 @@
           <p:nvPr/>
         </p:nvPicPr>
         <p:blipFill>
-          <a:blip r:embed="rId13"/>
+          <a:blip r:embed="rId3"/>
           <a:stretch>
             <a:fillRect/>
           </a:stretch>
@@ -8059,7 +8268,7 @@
           </a:ln>
         </p:spPr>
         <p:txBody>
-          <a:bodyPr wrap="square" lIns="0" tIns="0" rIns="0" bIns="0" anchor="ctr" rtlCol="0">
+          <a:bodyPr wrap="square" lIns="0" tIns="0" rIns="0" bIns="0" rtlCol="0" anchor="ctr">
             <a:noAutofit/>
           </a:bodyPr>
           <a:lstStyle/>
@@ -8123,6 +8332,13 @@
             <a:noFill/>
           </a:ln>
         </p:spPr>
+        <p:txBody>
+          <a:bodyPr/>
+          <a:lstStyle/>
+          <a:p>
+            <a:endParaRPr lang="en-IN"/>
+          </a:p>
+        </p:txBody>
       </p:sp>
       <p:sp>
         <p:nvSpPr>
@@ -8145,6 +8361,13 @@
             <a:noFill/>
           </a:ln>
         </p:spPr>
+        <p:txBody>
+          <a:bodyPr/>
+          <a:lstStyle/>
+          <a:p>
+            <a:endParaRPr lang="en-IN"/>
+          </a:p>
+        </p:txBody>
       </p:sp>
       <p:pic>
         <p:nvPicPr>
@@ -8155,7 +8378,7 @@
           <p:nvPr/>
         </p:nvPicPr>
         <p:blipFill>
-          <a:blip r:embed="rId14"/>
+          <a:blip r:embed="rId3"/>
           <a:stretch>
             <a:fillRect/>
           </a:stretch>
@@ -8190,7 +8413,7 @@
           </a:ln>
         </p:spPr>
         <p:txBody>
-          <a:bodyPr wrap="square" lIns="0" tIns="0" rIns="0" bIns="0" anchor="ctr" rtlCol="0">
+          <a:bodyPr wrap="square" lIns="0" tIns="0" rIns="0" bIns="0" rtlCol="0" anchor="ctr">
             <a:noAutofit/>
           </a:bodyPr>
           <a:lstStyle/>
@@ -8232,7 +8455,7 @@
                 <a:latin typeface="+mn-lt"/>
                 <a:cs typeface="+mn-lt"/>
               </a:rPr>
-              <a:t> — the only true test of deliverability.</a:t>
+              <a:t> : the only true test of deliverability.</a:t>
             </a:r>
             <a:endParaRPr lang="en-US" sz="1400" dirty="0"/>
           </a:p>
@@ -8263,6 +8486,13 @@
             <a:noFill/>
           </a:ln>
         </p:spPr>
+        <p:txBody>
+          <a:bodyPr/>
+          <a:lstStyle/>
+          <a:p>
+            <a:endParaRPr lang="en-IN"/>
+          </a:p>
+        </p:txBody>
       </p:sp>
       <p:sp>
         <p:nvSpPr>
@@ -8284,7 +8514,7 @@
           </a:ln>
         </p:spPr>
         <p:txBody>
-          <a:bodyPr wrap="square" lIns="0" tIns="0" rIns="0" bIns="0" anchor="ctr" rtlCol="0">
+          <a:bodyPr wrap="square" lIns="0" tIns="0" rIns="0" bIns="0" rtlCol="0" anchor="ctr">
             <a:noAutofit/>
           </a:bodyPr>
           <a:lstStyle/>
@@ -8346,7 +8576,7 @@
           </a:ln>
         </p:spPr>
         <p:txBody>
-          <a:bodyPr wrap="square" lIns="0" tIns="0" rIns="0" bIns="0" anchor="ctr" rtlCol="0">
+          <a:bodyPr wrap="square" lIns="0" tIns="0" rIns="0" bIns="0" rtlCol="0" anchor="ctr">
             <a:noAutofit/>
           </a:bodyPr>
           <a:lstStyle/>
@@ -8420,7 +8650,7 @@
           </a:ln>
         </p:spPr>
         <p:txBody>
-          <a:bodyPr wrap="square" lIns="0" tIns="0" rIns="0" bIns="0" anchor="ctr" rtlCol="0">
+          <a:bodyPr wrap="square" lIns="0" tIns="0" rIns="0" bIns="0" rtlCol="0" anchor="ctr">
             <a:noAutofit/>
           </a:bodyPr>
           <a:lstStyle/>
@@ -8494,7 +8724,7 @@
           </a:ln>
         </p:spPr>
         <p:txBody>
-          <a:bodyPr wrap="square" lIns="0" tIns="0" rIns="0" bIns="0" anchor="ctr" rtlCol="0">
+          <a:bodyPr wrap="square" lIns="0" tIns="0" rIns="0" bIns="0" rtlCol="0" anchor="ctr">
             <a:noAutofit/>
           </a:bodyPr>
           <a:lstStyle/>
@@ -8544,7 +8774,7 @@
           </a:ln>
         </p:spPr>
         <p:txBody>
-          <a:bodyPr wrap="square" lIns="0" tIns="0" rIns="0" bIns="0" anchor="ctr" rtlCol="0">
+          <a:bodyPr wrap="square" lIns="0" tIns="0" rIns="0" bIns="0" rtlCol="0" anchor="ctr">
             <a:noAutofit/>
           </a:bodyPr>
           <a:lstStyle/>
@@ -8595,7 +8825,7 @@
           </a:ln>
         </p:spPr>
         <p:txBody>
-          <a:bodyPr wrap="square" lIns="0" tIns="0" rIns="0" bIns="0" anchor="ctr" rtlCol="0">
+          <a:bodyPr wrap="square" lIns="0" tIns="0" rIns="0" bIns="0" rtlCol="0" anchor="ctr">
             <a:noAutofit/>
           </a:bodyPr>
           <a:lstStyle/>
@@ -8615,6 +8845,15 @@
               </a:rPr>
               <a:t>13</a:t>
             </a:fld>
+            <a:endParaRPr lang="en-US" sz="1000" dirty="0">
+              <a:solidFill>
+                <a:schemeClr val="tx2">
+                  <a:lumMod val="65000"/>
+                  <a:lumOff val="35000"/>
+                </a:schemeClr>
+              </a:solidFill>
+              <a:latin typeface="+mn-lt"/>
+            </a:endParaRPr>
           </a:p>
         </p:txBody>
       </p:sp>
@@ -8663,7 +8902,7 @@
           </a:ln>
         </p:spPr>
         <p:txBody>
-          <a:bodyPr wrap="square" lIns="0" tIns="0" rIns="0" bIns="0" anchor="ctr" rtlCol="0">
+          <a:bodyPr wrap="square" lIns="0" tIns="0" rIns="0" bIns="0" rtlCol="0" anchor="ctr">
             <a:noAutofit/>
           </a:bodyPr>
           <a:lstStyle/>
@@ -8711,12 +8950,12 @@
           </a:ln>
         </p:spPr>
         <p:txBody>
-          <a:bodyPr wrap="square" lIns="0" tIns="0" rIns="0" bIns="0" anchor="t" rtlCol="0">
+          <a:bodyPr wrap="square" lIns="0" tIns="0" rIns="0" bIns="0" rtlCol="0" anchor="t">
             <a:noAutofit/>
           </a:bodyPr>
           <a:lstStyle/>
           <a:p>
-            <a:pPr algn="l" marL="228600" indent="-228600">
+            <a:pPr marL="228600" indent="-228600" algn="l">
               <a:spcBef>
                 <a:spcPts val="0"/>
               </a:spcBef>
@@ -8737,7 +8976,7 @@
                 <a:latin typeface="+mn-lt"/>
                 <a:cs typeface="+mn-lt"/>
               </a:rPr>
-              <a:t>R. Nageswara Rao — </a:t>
+              <a:t>R. Nageswara Rao : </a:t>
             </a:r>
             <a:r>
               <a:rPr lang="en-US" sz="1400" b="0" i="1" dirty="0">
@@ -8762,7 +9001,7 @@
             <a:endParaRPr lang="en-US" sz="1400" dirty="0"/>
           </a:p>
           <a:p>
-            <a:pPr algn="l" marL="228600" indent="-228600">
+            <a:pPr marL="228600" indent="-228600" algn="l">
               <a:spcBef>
                 <a:spcPts val="0"/>
               </a:spcBef>
@@ -8783,7 +9022,7 @@
                 <a:latin typeface="+mn-lt"/>
                 <a:cs typeface="+mn-lt"/>
               </a:rPr>
-              <a:t>Gowrishankar S. &amp; Veena A. — </a:t>
+              <a:t>Gowrishankar S. &amp; Veena A. : </a:t>
             </a:r>
             <a:r>
               <a:rPr lang="en-US" sz="1400" b="0" i="1" dirty="0">
@@ -8808,7 +9047,7 @@
             <a:endParaRPr lang="en-US" sz="1400" dirty="0"/>
           </a:p>
           <a:p>
-            <a:pPr algn="l" marL="228600" indent="-228600">
+            <a:pPr marL="228600" indent="-228600" algn="l">
               <a:spcBef>
                 <a:spcPts val="0"/>
               </a:spcBef>
@@ -8829,7 +9068,7 @@
                 <a:latin typeface="+mn-lt"/>
                 <a:cs typeface="+mn-lt"/>
               </a:rPr>
-              <a:t>Python Standard Library docs — </a:t>
+              <a:t>Python Standard Library docs : </a:t>
             </a:r>
             <a:r>
               <a:rPr lang="en-US" sz="1302" b="0" i="0" dirty="0">
@@ -8922,7 +9161,7 @@
             <a:endParaRPr lang="en-US" sz="1400" dirty="0"/>
           </a:p>
           <a:p>
-            <a:pPr algn="l" marL="228600" indent="-228600">
+            <a:pPr marL="228600" indent="-228600" algn="l">
               <a:spcBef>
                 <a:spcPts val="0"/>
               </a:spcBef>
@@ -8943,12 +9182,12 @@
                 <a:latin typeface="+mn-lt"/>
                 <a:cs typeface="+mn-lt"/>
               </a:rPr>
-              <a:t>RFC 5321 / RFC 5322 — Internet Message Format and SMTP standards.</a:t>
+              <a:t>RFC 5321 / RFC 5322 : Internet Message Format and SMTP standards.</a:t>
             </a:r>
             <a:endParaRPr lang="en-US" sz="1400" dirty="0"/>
           </a:p>
           <a:p>
-            <a:pPr algn="l" marL="228600" indent="-228600">
+            <a:pPr marL="228600" indent="-228600" algn="l">
               <a:spcBef>
                 <a:spcPts val="0"/>
               </a:spcBef>
@@ -8969,7 +9208,7 @@
                 <a:latin typeface="+mn-lt"/>
                 <a:cs typeface="+mn-lt"/>
               </a:rPr>
-              <a:t>Course lecture notes — Python modules 2, 4 &amp; 5 (Strings, Functions/Modules, Exceptions &amp; OOP).</a:t>
+              <a:t>Course lecture notes : Python modules 2, 4 &amp; 5 (Strings, Functions/Modules, Exceptions &amp; OOP).</a:t>
             </a:r>
             <a:endParaRPr lang="en-US" sz="1400" dirty="0"/>
           </a:p>
@@ -9000,6 +9239,13 @@
             <a:noFill/>
           </a:ln>
         </p:spPr>
+        <p:txBody>
+          <a:bodyPr/>
+          <a:lstStyle/>
+          <a:p>
+            <a:endParaRPr lang="en-IN"/>
+          </a:p>
+        </p:txBody>
       </p:sp>
       <p:sp>
         <p:nvSpPr>
@@ -9022,6 +9268,13 @@
             <a:noFill/>
           </a:ln>
         </p:spPr>
+        <p:txBody>
+          <a:bodyPr/>
+          <a:lstStyle/>
+          <a:p>
+            <a:endParaRPr lang="en-IN"/>
+          </a:p>
+        </p:txBody>
       </p:sp>
       <p:pic>
         <p:nvPicPr>
@@ -9032,7 +9285,7 @@
           <p:nvPr/>
         </p:nvPicPr>
         <p:blipFill>
-          <a:blip r:embed="rId10"/>
+          <a:blip r:embed="rId3"/>
           <a:stretch>
             <a:fillRect/>
           </a:stretch>
@@ -9067,7 +9320,7 @@
           </a:ln>
         </p:spPr>
         <p:txBody>
-          <a:bodyPr wrap="square" lIns="0" tIns="0" rIns="0" bIns="0" anchor="ctr" rtlCol="0">
+          <a:bodyPr wrap="square" lIns="0" tIns="0" rIns="0" bIns="0" rtlCol="0" anchor="ctr">
             <a:noAutofit/>
           </a:bodyPr>
           <a:lstStyle/>
@@ -9089,7 +9342,7 @@
                 <a:latin typeface="+mj-lt"/>
                 <a:cs typeface="+mj-lt"/>
               </a:rPr>
-              <a:t>Thank you for your attention — Questions are welcome.</a:t>
+              <a:t>Thank you for your attention : Questions are welcome.</a:t>
             </a:r>
             <a:endParaRPr lang="en-US" sz="2200" dirty="0"/>
           </a:p>
@@ -9138,6 +9391,13 @@
             <a:noFill/>
           </a:ln>
         </p:spPr>
+        <p:txBody>
+          <a:bodyPr/>
+          <a:lstStyle/>
+          <a:p>
+            <a:endParaRPr lang="en-IN"/>
+          </a:p>
+        </p:txBody>
       </p:sp>
       <p:pic>
         <p:nvPicPr>
@@ -9148,7 +9408,7 @@
           <p:nvPr/>
         </p:nvPicPr>
         <p:blipFill>
-          <a:blip r:embed="rId11"/>
+          <a:blip r:embed="rId4"/>
           <a:stretch>
             <a:fillRect/>
           </a:stretch>
@@ -9183,7 +9443,7 @@
           </a:ln>
         </p:spPr>
         <p:txBody>
-          <a:bodyPr wrap="square" lIns="0" tIns="0" rIns="0" bIns="0" anchor="ctr" rtlCol="0">
+          <a:bodyPr wrap="square" lIns="0" tIns="0" rIns="0" bIns="0" rtlCol="0" anchor="ctr">
             <a:noAutofit/>
           </a:bodyPr>
           <a:lstStyle/>
@@ -9234,7 +9494,7 @@
           </a:ln>
         </p:spPr>
         <p:txBody>
-          <a:bodyPr wrap="square" lIns="0" tIns="0" rIns="0" bIns="0" anchor="ctr" rtlCol="0">
+          <a:bodyPr wrap="square" lIns="0" tIns="0" rIns="0" bIns="0" rtlCol="0" anchor="ctr">
             <a:noAutofit/>
           </a:bodyPr>
           <a:lstStyle/>
@@ -9254,6 +9514,15 @@
               </a:rPr>
               <a:t>14</a:t>
             </a:fld>
+            <a:endParaRPr lang="en-US" sz="1000" dirty="0">
+              <a:solidFill>
+                <a:schemeClr val="tx2">
+                  <a:lumMod val="65000"/>
+                  <a:lumOff val="35000"/>
+                </a:schemeClr>
+              </a:solidFill>
+              <a:latin typeface="+mn-lt"/>
+            </a:endParaRPr>
           </a:p>
         </p:txBody>
       </p:sp>
@@ -9302,7 +9571,7 @@
           </a:ln>
         </p:spPr>
         <p:txBody>
-          <a:bodyPr wrap="square" lIns="0" tIns="0" rIns="0" bIns="0" anchor="ctr" rtlCol="0">
+          <a:bodyPr wrap="square" lIns="0" tIns="0" rIns="0" bIns="0" rtlCol="0" anchor="ctr">
             <a:noAutofit/>
           </a:bodyPr>
           <a:lstStyle/>
@@ -9324,7 +9593,7 @@
                 <a:latin typeface="+mj-lt"/>
                 <a:cs typeface="+mj-lt"/>
               </a:rPr>
-              <a:t>Introduction — Why Validate E-mail Addresses?</a:t>
+              <a:t>Introduction : Why Validate E-mail Addresses?</a:t>
             </a:r>
             <a:endParaRPr lang="en-US" sz="2600" dirty="0"/>
           </a:p>
@@ -9350,12 +9619,12 @@
           </a:ln>
         </p:spPr>
         <p:txBody>
-          <a:bodyPr wrap="square" lIns="0" tIns="0" rIns="0" bIns="0" anchor="t" rtlCol="0">
+          <a:bodyPr wrap="square" lIns="0" tIns="0" rIns="0" bIns="0" rtlCol="0" anchor="t">
             <a:noAutofit/>
           </a:bodyPr>
           <a:lstStyle/>
           <a:p>
-            <a:pPr algn="l" marL="228600" indent="-228600">
+            <a:pPr marL="228600" indent="-228600" algn="l">
               <a:spcBef>
                 <a:spcPts val="0"/>
               </a:spcBef>
@@ -9381,7 +9650,7 @@
             <a:endParaRPr lang="en-US" sz="1400" dirty="0"/>
           </a:p>
           <a:p>
-            <a:pPr algn="l" marL="228600" indent="-228600">
+            <a:pPr marL="228600" indent="-228600" algn="l">
               <a:spcBef>
                 <a:spcPts val="0"/>
               </a:spcBef>
@@ -9407,7 +9676,7 @@
             <a:endParaRPr lang="en-US" sz="1400" dirty="0"/>
           </a:p>
           <a:p>
-            <a:pPr algn="l" marL="228600" indent="-228600">
+            <a:pPr marL="228600" indent="-228600" algn="l">
               <a:spcBef>
                 <a:spcPts val="0"/>
               </a:spcBef>
@@ -9477,7 +9746,7 @@
             <a:endParaRPr lang="en-US" sz="1400" dirty="0"/>
           </a:p>
           <a:p>
-            <a:pPr algn="l" marL="228600" indent="-228600">
+            <a:pPr marL="228600" indent="-228600" algn="l">
               <a:spcBef>
                 <a:spcPts val="0"/>
               </a:spcBef>
@@ -9543,7 +9812,7 @@
             <a:endParaRPr lang="en-US" sz="1400" dirty="0"/>
           </a:p>
           <a:p>
-            <a:pPr algn="l" marL="228600" indent="-228600">
+            <a:pPr marL="228600" indent="-228600" algn="l">
               <a:spcBef>
                 <a:spcPts val="0"/>
               </a:spcBef>
@@ -9635,7 +9904,7 @@
             <a:endParaRPr lang="en-US" sz="1400" dirty="0"/>
           </a:p>
           <a:p>
-            <a:pPr algn="l" marL="228600" indent="-228600">
+            <a:pPr marL="228600" indent="-228600" algn="l">
               <a:spcBef>
                 <a:spcPts val="0"/>
               </a:spcBef>
@@ -9708,6 +9977,13 @@
             <a:noFill/>
           </a:ln>
         </p:spPr>
+        <p:txBody>
+          <a:bodyPr/>
+          <a:lstStyle/>
+          <a:p>
+            <a:endParaRPr lang="en-IN"/>
+          </a:p>
+        </p:txBody>
       </p:sp>
       <p:sp>
         <p:nvSpPr>
@@ -9729,7 +10005,7 @@
           </a:ln>
         </p:spPr>
         <p:txBody>
-          <a:bodyPr wrap="square" lIns="0" tIns="0" rIns="0" bIns="0" anchor="ctr" rtlCol="0">
+          <a:bodyPr wrap="square" lIns="0" tIns="0" rIns="0" bIns="0" rtlCol="0" anchor="ctr">
             <a:noAutofit/>
           </a:bodyPr>
           <a:lstStyle/>
@@ -9782,6 +10058,13 @@
             </a:solidFill>
           </a:ln>
         </p:spPr>
+        <p:txBody>
+          <a:bodyPr/>
+          <a:lstStyle/>
+          <a:p>
+            <a:endParaRPr lang="en-IN"/>
+          </a:p>
+        </p:txBody>
       </p:sp>
       <p:sp>
         <p:nvSpPr>
@@ -9805,7 +10088,7 @@
           </a:ln>
         </p:spPr>
         <p:txBody>
-          <a:bodyPr wrap="square" lIns="0" tIns="0" rIns="0" bIns="0" anchor="ctr" rtlCol="0">
+          <a:bodyPr wrap="square" lIns="0" tIns="0" rIns="0" bIns="0" rtlCol="0" anchor="ctr">
             <a:noAutofit/>
           </a:bodyPr>
           <a:lstStyle/>
@@ -9853,7 +10136,7 @@
           </a:ln>
         </p:spPr>
         <p:txBody>
-          <a:bodyPr wrap="square" lIns="0" tIns="0" rIns="0" bIns="0" anchor="ctr" rtlCol="0">
+          <a:bodyPr wrap="square" lIns="0" tIns="0" rIns="0" bIns="0" rtlCol="0" anchor="ctr">
             <a:noAutofit/>
           </a:bodyPr>
           <a:lstStyle/>
@@ -9930,6 +10213,13 @@
             </a:solidFill>
           </a:ln>
         </p:spPr>
+        <p:txBody>
+          <a:bodyPr/>
+          <a:lstStyle/>
+          <a:p>
+            <a:endParaRPr lang="en-IN"/>
+          </a:p>
+        </p:txBody>
       </p:sp>
       <p:sp>
         <p:nvSpPr>
@@ -9953,7 +10243,7 @@
           </a:ln>
         </p:spPr>
         <p:txBody>
-          <a:bodyPr wrap="square" lIns="0" tIns="0" rIns="0" bIns="0" anchor="ctr" rtlCol="0">
+          <a:bodyPr wrap="square" lIns="0" tIns="0" rIns="0" bIns="0" rtlCol="0" anchor="ctr">
             <a:noAutofit/>
           </a:bodyPr>
           <a:lstStyle/>
@@ -10001,7 +10291,7 @@
           </a:ln>
         </p:spPr>
         <p:txBody>
-          <a:bodyPr wrap="square" lIns="0" tIns="0" rIns="0" bIns="0" anchor="ctr" rtlCol="0">
+          <a:bodyPr wrap="square" lIns="0" tIns="0" rIns="0" bIns="0" rtlCol="0" anchor="ctr">
             <a:noAutofit/>
           </a:bodyPr>
           <a:lstStyle/>
@@ -10078,6 +10368,13 @@
             </a:solidFill>
           </a:ln>
         </p:spPr>
+        <p:txBody>
+          <a:bodyPr/>
+          <a:lstStyle/>
+          <a:p>
+            <a:endParaRPr lang="en-IN"/>
+          </a:p>
+        </p:txBody>
       </p:sp>
       <p:sp>
         <p:nvSpPr>
@@ -10101,7 +10398,7 @@
           </a:ln>
         </p:spPr>
         <p:txBody>
-          <a:bodyPr wrap="square" lIns="0" tIns="0" rIns="0" bIns="0" anchor="ctr" rtlCol="0">
+          <a:bodyPr wrap="square" lIns="0" tIns="0" rIns="0" bIns="0" rtlCol="0" anchor="ctr">
             <a:noAutofit/>
           </a:bodyPr>
           <a:lstStyle/>
@@ -10149,7 +10446,7 @@
           </a:ln>
         </p:spPr>
         <p:txBody>
-          <a:bodyPr wrap="square" lIns="0" tIns="0" rIns="0" bIns="0" anchor="ctr" rtlCol="0">
+          <a:bodyPr wrap="square" lIns="0" tIns="0" rIns="0" bIns="0" rtlCol="0" anchor="ctr">
             <a:noAutofit/>
           </a:bodyPr>
           <a:lstStyle/>
@@ -10246,7 +10543,7 @@
           </a:ln>
         </p:spPr>
         <p:txBody>
-          <a:bodyPr wrap="square" lIns="0" tIns="0" rIns="0" bIns="0" anchor="ctr" rtlCol="0">
+          <a:bodyPr wrap="square" lIns="0" tIns="0" rIns="0" bIns="0" rtlCol="0" anchor="ctr">
             <a:noAutofit/>
           </a:bodyPr>
           <a:lstStyle/>
@@ -10300,6 +10597,13 @@
             <a:noFill/>
           </a:ln>
         </p:spPr>
+        <p:txBody>
+          <a:bodyPr/>
+          <a:lstStyle/>
+          <a:p>
+            <a:endParaRPr lang="en-IN"/>
+          </a:p>
+        </p:txBody>
       </p:sp>
       <p:sp>
         <p:nvSpPr>
@@ -10323,7 +10627,7 @@
           </a:ln>
         </p:spPr>
         <p:txBody>
-          <a:bodyPr wrap="square" lIns="0" tIns="0" rIns="0" bIns="0" anchor="ctr" rtlCol="0">
+          <a:bodyPr wrap="square" lIns="0" tIns="0" rIns="0" bIns="0" rtlCol="0" anchor="ctr">
             <a:noAutofit/>
           </a:bodyPr>
           <a:lstStyle/>
@@ -10371,7 +10675,7 @@
           </a:ln>
         </p:spPr>
         <p:txBody>
-          <a:bodyPr wrap="square" lIns="0" tIns="0" rIns="0" bIns="0" anchor="ctr" rtlCol="0">
+          <a:bodyPr wrap="square" lIns="0" tIns="0" rIns="0" bIns="0" rtlCol="0" anchor="ctr">
             <a:noAutofit/>
           </a:bodyPr>
           <a:lstStyle/>
@@ -10425,6 +10729,13 @@
             <a:noFill/>
           </a:ln>
         </p:spPr>
+        <p:txBody>
+          <a:bodyPr/>
+          <a:lstStyle/>
+          <a:p>
+            <a:endParaRPr lang="en-IN"/>
+          </a:p>
+        </p:txBody>
       </p:sp>
       <p:sp>
         <p:nvSpPr>
@@ -10448,7 +10759,7 @@
           </a:ln>
         </p:spPr>
         <p:txBody>
-          <a:bodyPr wrap="square" lIns="0" tIns="0" rIns="0" bIns="0" anchor="ctr" rtlCol="0">
+          <a:bodyPr wrap="square" lIns="0" tIns="0" rIns="0" bIns="0" rtlCol="0" anchor="ctr">
             <a:noAutofit/>
           </a:bodyPr>
           <a:lstStyle/>
@@ -10496,7 +10807,7 @@
           </a:ln>
         </p:spPr>
         <p:txBody>
-          <a:bodyPr wrap="square" lIns="0" tIns="0" rIns="0" bIns="0" anchor="ctr" rtlCol="0">
+          <a:bodyPr wrap="square" lIns="0" tIns="0" rIns="0" bIns="0" rtlCol="0" anchor="ctr">
             <a:noAutofit/>
           </a:bodyPr>
           <a:lstStyle/>
@@ -10550,6 +10861,13 @@
             <a:noFill/>
           </a:ln>
         </p:spPr>
+        <p:txBody>
+          <a:bodyPr/>
+          <a:lstStyle/>
+          <a:p>
+            <a:endParaRPr lang="en-IN"/>
+          </a:p>
+        </p:txBody>
       </p:sp>
       <p:sp>
         <p:nvSpPr>
@@ -10573,7 +10891,7 @@
           </a:ln>
         </p:spPr>
         <p:txBody>
-          <a:bodyPr wrap="square" lIns="0" tIns="0" rIns="0" bIns="0" anchor="ctr" rtlCol="0">
+          <a:bodyPr wrap="square" lIns="0" tIns="0" rIns="0" bIns="0" rtlCol="0" anchor="ctr">
             <a:noAutofit/>
           </a:bodyPr>
           <a:lstStyle/>
@@ -10621,7 +10939,7 @@
           </a:ln>
         </p:spPr>
         <p:txBody>
-          <a:bodyPr wrap="square" lIns="0" tIns="0" rIns="0" bIns="0" anchor="ctr" rtlCol="0">
+          <a:bodyPr wrap="square" lIns="0" tIns="0" rIns="0" bIns="0" rtlCol="0" anchor="ctr">
             <a:noAutofit/>
           </a:bodyPr>
           <a:lstStyle/>
@@ -10675,6 +10993,13 @@
             <a:noFill/>
           </a:ln>
         </p:spPr>
+        <p:txBody>
+          <a:bodyPr/>
+          <a:lstStyle/>
+          <a:p>
+            <a:endParaRPr lang="en-IN"/>
+          </a:p>
+        </p:txBody>
       </p:sp>
       <p:sp>
         <p:nvSpPr>
@@ -10698,7 +11023,7 @@
           </a:ln>
         </p:spPr>
         <p:txBody>
-          <a:bodyPr wrap="square" lIns="0" tIns="0" rIns="0" bIns="0" anchor="ctr" rtlCol="0">
+          <a:bodyPr wrap="square" lIns="0" tIns="0" rIns="0" bIns="0" rtlCol="0" anchor="ctr">
             <a:noAutofit/>
           </a:bodyPr>
           <a:lstStyle/>
@@ -10746,7 +11071,7 @@
           </a:ln>
         </p:spPr>
         <p:txBody>
-          <a:bodyPr wrap="square" lIns="0" tIns="0" rIns="0" bIns="0" anchor="ctr" rtlCol="0">
+          <a:bodyPr wrap="square" lIns="0" tIns="0" rIns="0" bIns="0" rtlCol="0" anchor="ctr">
             <a:noAutofit/>
           </a:bodyPr>
           <a:lstStyle/>
@@ -10800,6 +11125,13 @@
             <a:noFill/>
           </a:ln>
         </p:spPr>
+        <p:txBody>
+          <a:bodyPr/>
+          <a:lstStyle/>
+          <a:p>
+            <a:endParaRPr lang="en-IN"/>
+          </a:p>
+        </p:txBody>
       </p:sp>
       <p:sp>
         <p:nvSpPr>
@@ -10823,7 +11155,7 @@
           </a:ln>
         </p:spPr>
         <p:txBody>
-          <a:bodyPr wrap="square" lIns="0" tIns="0" rIns="0" bIns="0" anchor="ctr" rtlCol="0">
+          <a:bodyPr wrap="square" lIns="0" tIns="0" rIns="0" bIns="0" rtlCol="0" anchor="ctr">
             <a:noAutofit/>
           </a:bodyPr>
           <a:lstStyle/>
@@ -10871,7 +11203,7 @@
           </a:ln>
         </p:spPr>
         <p:txBody>
-          <a:bodyPr wrap="square" lIns="0" tIns="0" rIns="0" bIns="0" anchor="ctr" rtlCol="0">
+          <a:bodyPr wrap="square" lIns="0" tIns="0" rIns="0" bIns="0" rtlCol="0" anchor="ctr">
             <a:noAutofit/>
           </a:bodyPr>
           <a:lstStyle/>
@@ -10925,6 +11257,13 @@
             <a:noFill/>
           </a:ln>
         </p:spPr>
+        <p:txBody>
+          <a:bodyPr/>
+          <a:lstStyle/>
+          <a:p>
+            <a:endParaRPr lang="en-IN"/>
+          </a:p>
+        </p:txBody>
       </p:sp>
       <p:sp>
         <p:nvSpPr>
@@ -10948,7 +11287,7 @@
           </a:ln>
         </p:spPr>
         <p:txBody>
-          <a:bodyPr wrap="square" lIns="0" tIns="0" rIns="0" bIns="0" anchor="ctr" rtlCol="0">
+          <a:bodyPr wrap="square" lIns="0" tIns="0" rIns="0" bIns="0" rtlCol="0" anchor="ctr">
             <a:noAutofit/>
           </a:bodyPr>
           <a:lstStyle/>
@@ -10996,7 +11335,7 @@
           </a:ln>
         </p:spPr>
         <p:txBody>
-          <a:bodyPr wrap="square" lIns="0" tIns="0" rIns="0" bIns="0" anchor="ctr" rtlCol="0">
+          <a:bodyPr wrap="square" lIns="0" tIns="0" rIns="0" bIns="0" rtlCol="0" anchor="ctr">
             <a:noAutofit/>
           </a:bodyPr>
           <a:lstStyle/>
@@ -11018,7 +11357,7 @@
                 <a:latin typeface="+mn-lt"/>
                 <a:cs typeface="+mn-lt"/>
               </a:rPr>
-              <a:t>Code Walkthrough — Object-Oriented Design</a:t>
+              <a:t>Code Walkthrough : Object-Oriented Design</a:t>
             </a:r>
             <a:endParaRPr lang="en-US" sz="1400" dirty="0"/>
           </a:p>
@@ -11050,6 +11389,13 @@
             <a:noFill/>
           </a:ln>
         </p:spPr>
+        <p:txBody>
+          <a:bodyPr/>
+          <a:lstStyle/>
+          <a:p>
+            <a:endParaRPr lang="en-IN"/>
+          </a:p>
+        </p:txBody>
       </p:sp>
       <p:sp>
         <p:nvSpPr>
@@ -11073,7 +11419,7 @@
           </a:ln>
         </p:spPr>
         <p:txBody>
-          <a:bodyPr wrap="square" lIns="0" tIns="0" rIns="0" bIns="0" anchor="ctr" rtlCol="0">
+          <a:bodyPr wrap="square" lIns="0" tIns="0" rIns="0" bIns="0" rtlCol="0" anchor="ctr">
             <a:noAutofit/>
           </a:bodyPr>
           <a:lstStyle/>
@@ -11121,7 +11467,7 @@
           </a:ln>
         </p:spPr>
         <p:txBody>
-          <a:bodyPr wrap="square" lIns="0" tIns="0" rIns="0" bIns="0" anchor="ctr" rtlCol="0">
+          <a:bodyPr wrap="square" lIns="0" tIns="0" rIns="0" bIns="0" rtlCol="0" anchor="ctr">
             <a:noAutofit/>
           </a:bodyPr>
           <a:lstStyle/>
@@ -11143,7 +11489,7 @@
                 <a:latin typeface="+mn-lt"/>
                 <a:cs typeface="+mn-lt"/>
               </a:rPr>
-              <a:t>Advanced — DNS/MX &amp; SMTP Checks</a:t>
+              <a:t>Advanced : DNS/MX &amp; SMTP Checks</a:t>
             </a:r>
             <a:endParaRPr lang="en-US" sz="1400" dirty="0"/>
           </a:p>
@@ -11175,6 +11521,13 @@
             <a:noFill/>
           </a:ln>
         </p:spPr>
+        <p:txBody>
+          <a:bodyPr/>
+          <a:lstStyle/>
+          <a:p>
+            <a:endParaRPr lang="en-IN"/>
+          </a:p>
+        </p:txBody>
       </p:sp>
       <p:sp>
         <p:nvSpPr>
@@ -11198,7 +11551,7 @@
           </a:ln>
         </p:spPr>
         <p:txBody>
-          <a:bodyPr wrap="square" lIns="0" tIns="0" rIns="0" bIns="0" anchor="ctr" rtlCol="0">
+          <a:bodyPr wrap="square" lIns="0" tIns="0" rIns="0" bIns="0" rtlCol="0" anchor="ctr">
             <a:noAutofit/>
           </a:bodyPr>
           <a:lstStyle/>
@@ -11246,7 +11599,7 @@
           </a:ln>
         </p:spPr>
         <p:txBody>
-          <a:bodyPr wrap="square" lIns="0" tIns="0" rIns="0" bIns="0" anchor="ctr" rtlCol="0">
+          <a:bodyPr wrap="square" lIns="0" tIns="0" rIns="0" bIns="0" rtlCol="0" anchor="ctr">
             <a:noAutofit/>
           </a:bodyPr>
           <a:lstStyle/>
@@ -11300,6 +11653,13 @@
             <a:noFill/>
           </a:ln>
         </p:spPr>
+        <p:txBody>
+          <a:bodyPr/>
+          <a:lstStyle/>
+          <a:p>
+            <a:endParaRPr lang="en-IN"/>
+          </a:p>
+        </p:txBody>
       </p:sp>
       <p:sp>
         <p:nvSpPr>
@@ -11323,7 +11683,7 @@
           </a:ln>
         </p:spPr>
         <p:txBody>
-          <a:bodyPr wrap="square" lIns="0" tIns="0" rIns="0" bIns="0" anchor="ctr" rtlCol="0">
+          <a:bodyPr wrap="square" lIns="0" tIns="0" rIns="0" bIns="0" rtlCol="0" anchor="ctr">
             <a:noAutofit/>
           </a:bodyPr>
           <a:lstStyle/>
@@ -11371,7 +11731,7 @@
           </a:ln>
         </p:spPr>
         <p:txBody>
-          <a:bodyPr wrap="square" lIns="0" tIns="0" rIns="0" bIns="0" anchor="ctr" rtlCol="0">
+          <a:bodyPr wrap="square" lIns="0" tIns="0" rIns="0" bIns="0" rtlCol="0" anchor="ctr">
             <a:noAutofit/>
           </a:bodyPr>
           <a:lstStyle/>
@@ -11425,6 +11785,13 @@
             <a:noFill/>
           </a:ln>
         </p:spPr>
+        <p:txBody>
+          <a:bodyPr/>
+          <a:lstStyle/>
+          <a:p>
+            <a:endParaRPr lang="en-IN"/>
+          </a:p>
+        </p:txBody>
       </p:sp>
       <p:sp>
         <p:nvSpPr>
@@ -11448,7 +11815,7 @@
           </a:ln>
         </p:spPr>
         <p:txBody>
-          <a:bodyPr wrap="square" lIns="0" tIns="0" rIns="0" bIns="0" anchor="ctr" rtlCol="0">
+          <a:bodyPr wrap="square" lIns="0" tIns="0" rIns="0" bIns="0" rtlCol="0" anchor="ctr">
             <a:noAutofit/>
           </a:bodyPr>
           <a:lstStyle/>
@@ -11496,7 +11863,7 @@
           </a:ln>
         </p:spPr>
         <p:txBody>
-          <a:bodyPr wrap="square" lIns="0" tIns="0" rIns="0" bIns="0" anchor="ctr" rtlCol="0">
+          <a:bodyPr wrap="square" lIns="0" tIns="0" rIns="0" bIns="0" rtlCol="0" anchor="ctr">
             <a:noAutofit/>
           </a:bodyPr>
           <a:lstStyle/>
@@ -11544,7 +11911,7 @@
           </a:ln>
         </p:spPr>
         <p:txBody>
-          <a:bodyPr wrap="square" lIns="0" tIns="0" rIns="0" bIns="0" anchor="ctr" rtlCol="0">
+          <a:bodyPr wrap="square" lIns="0" tIns="0" rIns="0" bIns="0" rtlCol="0" anchor="ctr">
             <a:noAutofit/>
           </a:bodyPr>
           <a:lstStyle/>
@@ -11595,7 +11962,7 @@
           </a:ln>
         </p:spPr>
         <p:txBody>
-          <a:bodyPr wrap="square" lIns="0" tIns="0" rIns="0" bIns="0" anchor="ctr" rtlCol="0">
+          <a:bodyPr wrap="square" lIns="0" tIns="0" rIns="0" bIns="0" rtlCol="0" anchor="ctr">
             <a:noAutofit/>
           </a:bodyPr>
           <a:lstStyle/>
@@ -11615,6 +11982,15 @@
               </a:rPr>
               <a:t>3</a:t>
             </a:fld>
+            <a:endParaRPr lang="en-US" sz="1000" dirty="0">
+              <a:solidFill>
+                <a:schemeClr val="tx2">
+                  <a:lumMod val="65000"/>
+                  <a:lumOff val="35000"/>
+                </a:schemeClr>
+              </a:solidFill>
+              <a:latin typeface="+mn-lt"/>
+            </a:endParaRPr>
           </a:p>
         </p:txBody>
       </p:sp>
@@ -11663,7 +12039,7 @@
           </a:ln>
         </p:spPr>
         <p:txBody>
-          <a:bodyPr wrap="square" lIns="0" tIns="0" rIns="0" bIns="0" anchor="ctr" rtlCol="0">
+          <a:bodyPr wrap="square" lIns="0" tIns="0" rIns="0" bIns="0" rtlCol="0" anchor="ctr">
             <a:noAutofit/>
           </a:bodyPr>
           <a:lstStyle/>
@@ -11711,12 +12087,12 @@
           </a:ln>
         </p:spPr>
         <p:txBody>
-          <a:bodyPr wrap="square" lIns="0" tIns="0" rIns="0" bIns="0" anchor="t" rtlCol="0">
+          <a:bodyPr wrap="square" lIns="0" tIns="0" rIns="0" bIns="0" rtlCol="0" anchor="t">
             <a:noAutofit/>
           </a:bodyPr>
           <a:lstStyle/>
           <a:p>
-            <a:pPr algn="l" marL="228600" indent="-228600">
+            <a:pPr marL="228600" indent="-228600" algn="l">
               <a:spcBef>
                 <a:spcPts val="0"/>
               </a:spcBef>
@@ -11764,7 +12140,7 @@
             <a:endParaRPr lang="en-US" sz="1400" dirty="0"/>
           </a:p>
           <a:p>
-            <a:pPr algn="l" marL="228600" indent="-228600">
+            <a:pPr marL="228600" indent="-228600" algn="l">
               <a:spcBef>
                 <a:spcPts val="0"/>
               </a:spcBef>
@@ -11824,7 +12200,7 @@
             <a:endParaRPr lang="en-US" sz="1400" dirty="0"/>
           </a:p>
           <a:p>
-            <a:pPr algn="l" marL="228600" indent="-228600">
+            <a:pPr marL="228600" indent="-228600" algn="l">
               <a:spcBef>
                 <a:spcPts val="0"/>
               </a:spcBef>
@@ -11925,12 +12301,12 @@
           </a:ln>
         </p:spPr>
         <p:txBody>
-          <a:bodyPr wrap="square" lIns="0" tIns="0" rIns="0" bIns="0" anchor="t" rtlCol="0">
+          <a:bodyPr wrap="square" lIns="0" tIns="0" rIns="0" bIns="0" rtlCol="0" anchor="t">
             <a:noAutofit/>
           </a:bodyPr>
           <a:lstStyle/>
           <a:p>
-            <a:pPr algn="l" marL="228600" indent="-228600">
+            <a:pPr marL="228600" indent="-228600" algn="l">
               <a:spcBef>
                 <a:spcPts val="0"/>
               </a:spcBef>
@@ -11971,7 +12347,7 @@
                 <a:latin typeface="+mn-lt"/>
                 <a:cs typeface="+mn-lt"/>
               </a:rPr>
-              <a:t> — at least two letters (</a:t>
+              <a:t> : at least two letters (</a:t>
             </a:r>
             <a:r>
               <a:rPr lang="en-US" sz="1302" b="0" i="0" dirty="0">
@@ -12042,7 +12418,7 @@
             <a:endParaRPr lang="en-US" sz="1400" dirty="0"/>
           </a:p>
           <a:p>
-            <a:pPr algn="l" marL="228600" indent="-228600">
+            <a:pPr marL="228600" indent="-228600" algn="l">
               <a:spcBef>
                 <a:spcPts val="0"/>
               </a:spcBef>
@@ -12108,7 +12484,7 @@
             <a:endParaRPr lang="en-US" sz="1400" dirty="0"/>
           </a:p>
           <a:p>
-            <a:pPr algn="l" marL="228600" indent="-228600">
+            <a:pPr marL="228600" indent="-228600" algn="l">
               <a:spcBef>
                 <a:spcPts val="0"/>
               </a:spcBef>
@@ -12155,7 +12531,7 @@
           </a:ln>
         </p:spPr>
         <p:txBody>
-          <a:bodyPr wrap="square" lIns="0" tIns="0" rIns="0" bIns="0" anchor="ctr" rtlCol="0">
+          <a:bodyPr wrap="square" lIns="0" tIns="0" rIns="0" bIns="0" rtlCol="0" anchor="ctr">
             <a:noAutofit/>
           </a:bodyPr>
           <a:lstStyle/>
@@ -12215,7 +12591,7 @@
           </a:ln>
         </p:spPr>
         <p:txBody>
-          <a:bodyPr wrap="square" lIns="18288" tIns="0" rIns="18288" bIns="0" anchor="ctr" rtlCol="0">
+          <a:bodyPr wrap="square" lIns="18288" tIns="0" rIns="18288" bIns="0" rtlCol="0" anchor="ctr">
             <a:noAutofit/>
           </a:bodyPr>
           <a:lstStyle/>
@@ -12284,7 +12660,7 @@
           </a:ln>
         </p:spPr>
         <p:txBody>
-          <a:bodyPr wrap="square" lIns="0" tIns="0" rIns="0" bIns="0" anchor="ctr" rtlCol="0">
+          <a:bodyPr wrap="square" lIns="0" tIns="0" rIns="0" bIns="0" rtlCol="0" anchor="ctr">
             <a:noAutofit/>
           </a:bodyPr>
           <a:lstStyle/>
@@ -12338,7 +12714,7 @@
           </a:ln>
         </p:spPr>
         <p:txBody>
-          <a:bodyPr wrap="square" lIns="18288" tIns="0" rIns="18288" bIns="0" anchor="ctr" rtlCol="0">
+          <a:bodyPr wrap="square" lIns="18288" tIns="0" rIns="18288" bIns="0" rtlCol="0" anchor="ctr">
             <a:noAutofit/>
           </a:bodyPr>
           <a:lstStyle/>
@@ -12407,7 +12783,7 @@
           </a:ln>
         </p:spPr>
         <p:txBody>
-          <a:bodyPr wrap="square" lIns="0" tIns="0" rIns="0" bIns="0" anchor="ctr" rtlCol="0">
+          <a:bodyPr wrap="square" lIns="0" tIns="0" rIns="0" bIns="0" rtlCol="0" anchor="ctr">
             <a:noAutofit/>
           </a:bodyPr>
           <a:lstStyle/>
@@ -12464,7 +12840,7 @@
           </a:ln>
         </p:spPr>
         <p:txBody>
-          <a:bodyPr wrap="square" lIns="18288" tIns="0" rIns="18288" bIns="0" anchor="ctr" rtlCol="0">
+          <a:bodyPr wrap="square" lIns="18288" tIns="0" rIns="18288" bIns="0" rtlCol="0" anchor="ctr">
             <a:noAutofit/>
           </a:bodyPr>
           <a:lstStyle/>
@@ -12533,7 +12909,7 @@
           </a:ln>
         </p:spPr>
         <p:txBody>
-          <a:bodyPr wrap="square" lIns="0" tIns="0" rIns="0" bIns="0" anchor="ctr" rtlCol="0">
+          <a:bodyPr wrap="square" lIns="0" tIns="0" rIns="0" bIns="0" rtlCol="0" anchor="ctr">
             <a:noAutofit/>
           </a:bodyPr>
           <a:lstStyle/>
@@ -12590,7 +12966,7 @@
           </a:ln>
         </p:spPr>
         <p:txBody>
-          <a:bodyPr wrap="square" lIns="18288" tIns="0" rIns="18288" bIns="0" anchor="ctr" rtlCol="0">
+          <a:bodyPr wrap="square" lIns="18288" tIns="0" rIns="18288" bIns="0" rtlCol="0" anchor="ctr">
             <a:noAutofit/>
           </a:bodyPr>
           <a:lstStyle/>
@@ -12659,7 +13035,7 @@
           </a:ln>
         </p:spPr>
         <p:txBody>
-          <a:bodyPr wrap="square" lIns="0" tIns="0" rIns="0" bIns="0" anchor="ctr" rtlCol="0">
+          <a:bodyPr wrap="square" lIns="0" tIns="0" rIns="0" bIns="0" rtlCol="0" anchor="ctr">
             <a:noAutofit/>
           </a:bodyPr>
           <a:lstStyle/>
@@ -12731,7 +13107,7 @@
           </a:ln>
         </p:spPr>
         <p:txBody>
-          <a:bodyPr wrap="square" lIns="0" tIns="0" rIns="0" bIns="0" anchor="ctr" rtlCol="0">
+          <a:bodyPr wrap="square" lIns="0" tIns="0" rIns="0" bIns="0" rtlCol="0" anchor="ctr">
             <a:noAutofit/>
           </a:bodyPr>
           <a:lstStyle/>
@@ -12782,7 +13158,7 @@
           </a:ln>
         </p:spPr>
         <p:txBody>
-          <a:bodyPr wrap="square" lIns="0" tIns="0" rIns="0" bIns="0" anchor="ctr" rtlCol="0">
+          <a:bodyPr wrap="square" lIns="0" tIns="0" rIns="0" bIns="0" rtlCol="0" anchor="ctr">
             <a:noAutofit/>
           </a:bodyPr>
           <a:lstStyle/>
@@ -12833,7 +13209,7 @@
           </a:ln>
         </p:spPr>
         <p:txBody>
-          <a:bodyPr wrap="square" lIns="0" tIns="0" rIns="0" bIns="0" anchor="ctr" rtlCol="0">
+          <a:bodyPr wrap="square" lIns="0" tIns="0" rIns="0" bIns="0" rtlCol="0" anchor="ctr">
             <a:noAutofit/>
           </a:bodyPr>
           <a:lstStyle/>
@@ -12853,6 +13229,15 @@
               </a:rPr>
               <a:t>4</a:t>
             </a:fld>
+            <a:endParaRPr lang="en-US" sz="1000" dirty="0">
+              <a:solidFill>
+                <a:schemeClr val="tx2">
+                  <a:lumMod val="65000"/>
+                  <a:lumOff val="35000"/>
+                </a:schemeClr>
+              </a:solidFill>
+              <a:latin typeface="+mn-lt"/>
+            </a:endParaRPr>
           </a:p>
         </p:txBody>
       </p:sp>
@@ -12901,7 +13286,7 @@
           </a:ln>
         </p:spPr>
         <p:txBody>
-          <a:bodyPr wrap="square" lIns="0" tIns="0" rIns="0" bIns="0" anchor="ctr" rtlCol="0">
+          <a:bodyPr wrap="square" lIns="0" tIns="0" rIns="0" bIns="0" rtlCol="0" anchor="ctr">
             <a:noAutofit/>
           </a:bodyPr>
           <a:lstStyle/>
@@ -12949,12 +13334,12 @@
           </a:ln>
         </p:spPr>
         <p:txBody>
-          <a:bodyPr wrap="square" lIns="0" tIns="0" rIns="0" bIns="0" anchor="t" rtlCol="0">
+          <a:bodyPr wrap="square" lIns="0" tIns="0" rIns="0" bIns="0" rtlCol="0" anchor="t">
             <a:noAutofit/>
           </a:bodyPr>
           <a:lstStyle/>
           <a:p>
-            <a:pPr algn="l" marL="228600" indent="-228600">
+            <a:pPr marL="228600" indent="-228600" algn="l">
               <a:spcBef>
                 <a:spcPts val="0"/>
               </a:spcBef>
@@ -12985,12 +13370,12 @@
                 <a:latin typeface="+mn-lt"/>
                 <a:cs typeface="+mn-lt"/>
               </a:rPr>
-              <a:t> — a pattern match; fast, no network, catches most malformed input.</a:t>
+              <a:t> : a pattern match; fast, no network, catches most malformed input.</a:t>
             </a:r>
             <a:endParaRPr lang="en-US" sz="1400" dirty="0"/>
           </a:p>
           <a:p>
-            <a:pPr algn="l" marL="228600" indent="-228600">
+            <a:pPr marL="228600" indent="-228600" algn="l">
               <a:spcBef>
                 <a:spcPts val="0"/>
               </a:spcBef>
@@ -13021,7 +13406,7 @@
                 <a:latin typeface="+mn-lt"/>
                 <a:cs typeface="+mn-lt"/>
               </a:rPr>
-              <a:t> — </a:t>
+              <a:t> : </a:t>
             </a:r>
             <a:r>
               <a:rPr lang="en-US" sz="1302" b="0" i="0" dirty="0">
@@ -13070,7 +13455,7 @@
             <a:endParaRPr lang="en-US" sz="1400" dirty="0"/>
           </a:p>
           <a:p>
-            <a:pPr algn="l" marL="228600" indent="-228600">
+            <a:pPr marL="228600" indent="-228600" algn="l">
               <a:spcBef>
                 <a:spcPts val="0"/>
               </a:spcBef>
@@ -13101,7 +13486,7 @@
                 <a:latin typeface="+mn-lt"/>
                 <a:cs typeface="+mn-lt"/>
               </a:rPr>
-              <a:t> — </a:t>
+              <a:t> : </a:t>
             </a:r>
             <a:r>
               <a:rPr lang="en-US" sz="1302" b="0" i="0" dirty="0">
@@ -13172,7 +13557,7 @@
             <a:endParaRPr lang="en-US" sz="1400" dirty="0"/>
           </a:p>
           <a:p>
-            <a:pPr algn="l" marL="228600" indent="-228600">
+            <a:pPr marL="228600" indent="-228600" algn="l">
               <a:spcBef>
                 <a:spcPts val="0"/>
               </a:spcBef>
@@ -13238,7 +13623,7 @@
             <a:endParaRPr lang="en-US" sz="1400" dirty="0"/>
           </a:p>
           <a:p>
-            <a:pPr algn="l" marL="228600" indent="-228600">
+            <a:pPr marL="228600" indent="-228600" algn="l">
               <a:spcBef>
                 <a:spcPts val="0"/>
               </a:spcBef>
@@ -13279,12 +13664,12 @@
                 <a:latin typeface="+mn-lt"/>
                 <a:cs typeface="+mn-lt"/>
               </a:rPr>
-              <a:t> — cheap syntax check first, expensive network check only if it passes.</a:t>
+              <a:t> : cheap syntax check first, expensive network check only if it passes.</a:t>
             </a:r>
             <a:endParaRPr lang="en-US" sz="1400" dirty="0"/>
           </a:p>
           <a:p>
-            <a:pPr algn="l" marL="228600" indent="-228600">
+            <a:pPr marL="228600" indent="-228600" algn="l">
               <a:spcBef>
                 <a:spcPts val="0"/>
               </a:spcBef>
@@ -13337,7 +13722,7 @@
           </a:ln>
         </p:spPr>
         <p:txBody>
-          <a:bodyPr wrap="square" lIns="0" tIns="0" rIns="0" bIns="0" anchor="ctr" rtlCol="0">
+          <a:bodyPr wrap="square" lIns="0" tIns="0" rIns="0" bIns="0" rtlCol="0" anchor="ctr">
             <a:noAutofit/>
           </a:bodyPr>
           <a:lstStyle/>
@@ -13389,7 +13774,7 @@
           </a:ln>
         </p:spPr>
         <p:txBody>
-          <a:bodyPr wrap="square" lIns="0" tIns="0" rIns="0" bIns="0" anchor="ctr" rtlCol="0">
+          <a:bodyPr wrap="square" lIns="0" tIns="0" rIns="0" bIns="0" rtlCol="0" anchor="ctr">
             <a:noAutofit/>
           </a:bodyPr>
           <a:lstStyle/>
@@ -13441,7 +13826,7 @@
           </a:ln>
         </p:spPr>
         <p:txBody>
-          <a:bodyPr wrap="square" lIns="0" tIns="0" rIns="0" bIns="0" anchor="ctr" rtlCol="0">
+          <a:bodyPr wrap="square" lIns="0" tIns="0" rIns="0" bIns="0" rtlCol="0" anchor="ctr">
             <a:noAutofit/>
           </a:bodyPr>
           <a:lstStyle/>
@@ -13489,7 +13874,7 @@
           </a:ln>
         </p:spPr>
         <p:txBody>
-          <a:bodyPr wrap="square" lIns="0" tIns="0" rIns="0" bIns="0" anchor="t" rtlCol="0">
+          <a:bodyPr wrap="square" lIns="0" tIns="0" rIns="0" bIns="0" rtlCol="0" anchor="t">
             <a:noAutofit/>
           </a:bodyPr>
           <a:lstStyle/>
@@ -13565,7 +13950,7 @@
           </a:ln>
         </p:spPr>
         <p:txBody>
-          <a:bodyPr wrap="square" lIns="0" tIns="0" rIns="0" bIns="0" anchor="ctr" rtlCol="0">
+          <a:bodyPr wrap="square" lIns="0" tIns="0" rIns="0" bIns="0" rtlCol="0" anchor="ctr">
             <a:noAutofit/>
           </a:bodyPr>
           <a:lstStyle/>
@@ -13616,7 +14001,7 @@
           </a:ln>
         </p:spPr>
         <p:txBody>
-          <a:bodyPr wrap="square" lIns="0" tIns="0" rIns="0" bIns="0" anchor="ctr" rtlCol="0">
+          <a:bodyPr wrap="square" lIns="0" tIns="0" rIns="0" bIns="0" rtlCol="0" anchor="ctr">
             <a:noAutofit/>
           </a:bodyPr>
           <a:lstStyle/>
@@ -13636,6 +14021,15 @@
               </a:rPr>
               <a:t>5</a:t>
             </a:fld>
+            <a:endParaRPr lang="en-US" sz="1000" dirty="0">
+              <a:solidFill>
+                <a:schemeClr val="tx2">
+                  <a:lumMod val="65000"/>
+                  <a:lumOff val="35000"/>
+                </a:schemeClr>
+              </a:solidFill>
+              <a:latin typeface="+mn-lt"/>
+            </a:endParaRPr>
           </a:p>
         </p:txBody>
       </p:sp>
@@ -13684,7 +14078,7 @@
           </a:ln>
         </p:spPr>
         <p:txBody>
-          <a:bodyPr wrap="square" lIns="0" tIns="0" rIns="0" bIns="0" anchor="ctr" rtlCol="0">
+          <a:bodyPr wrap="square" lIns="0" tIns="0" rIns="0" bIns="0" rtlCol="0" anchor="ctr">
             <a:noAutofit/>
           </a:bodyPr>
           <a:lstStyle/>
@@ -13732,12 +14126,12 @@
           </a:ln>
         </p:spPr>
         <p:txBody>
-          <a:bodyPr wrap="square" lIns="0" tIns="0" rIns="0" bIns="0" anchor="t" rtlCol="0">
+          <a:bodyPr wrap="square" lIns="0" tIns="0" rIns="0" bIns="0" rtlCol="0" anchor="t">
             <a:noAutofit/>
           </a:bodyPr>
           <a:lstStyle/>
           <a:p>
-            <a:pPr algn="l" marL="228600" indent="-228600">
+            <a:pPr marL="228600" indent="-228600" algn="l">
               <a:spcBef>
                 <a:spcPts val="0"/>
               </a:spcBef>
@@ -13783,7 +14177,7 @@
             <a:endParaRPr lang="en-US" sz="1400" dirty="0"/>
           </a:p>
           <a:p>
-            <a:pPr algn="l" marL="228600" indent="-228600">
+            <a:pPr marL="228600" indent="-228600" algn="l">
               <a:spcBef>
                 <a:spcPts val="0"/>
               </a:spcBef>
@@ -13831,7 +14225,7 @@
             <a:endParaRPr lang="en-US" sz="1400" dirty="0"/>
           </a:p>
           <a:p>
-            <a:pPr algn="l" marL="228600" indent="-228600">
+            <a:pPr marL="228600" indent="-228600" algn="l">
               <a:spcBef>
                 <a:spcPts val="0"/>
               </a:spcBef>
@@ -13864,12 +14258,12 @@
                 <a:latin typeface="+mn-lt"/>
                 <a:cs typeface="+mn-lt"/>
               </a:rPr>
-              <a:t> anchor the whole string — prevents partial matches.</a:t>
+              <a:t> anchor the whole string : prevents partial matches.</a:t>
             </a:r>
             <a:endParaRPr lang="en-US" sz="1400" dirty="0"/>
           </a:p>
           <a:p>
-            <a:pPr algn="l" marL="228600" indent="-228600">
+            <a:pPr marL="228600" indent="-228600" algn="l">
               <a:spcBef>
                 <a:spcPts val="0"/>
               </a:spcBef>
@@ -13907,7 +14301,7 @@
             <a:endParaRPr lang="en-US" sz="1400" dirty="0"/>
           </a:p>
           <a:p>
-            <a:pPr algn="l" marL="228600" indent="-228600">
+            <a:pPr marL="228600" indent="-228600" algn="l">
               <a:spcBef>
                 <a:spcPts val="0"/>
               </a:spcBef>
@@ -13948,12 +14342,12 @@
                 <a:latin typeface="+mn-lt"/>
                 <a:cs typeface="+mn-lt"/>
               </a:rPr>
-              <a:t> — it cannot check MX records.</a:t>
+              <a:t> : it cannot check MX records.</a:t>
             </a:r>
             <a:endParaRPr lang="en-US" sz="1400" dirty="0"/>
           </a:p>
           <a:p>
-            <a:pPr algn="l" marL="228600" indent="-228600">
+            <a:pPr marL="228600" indent="-228600" algn="l">
               <a:spcBef>
                 <a:spcPts val="0"/>
               </a:spcBef>
@@ -14003,6 +14397,13 @@
             <a:noFill/>
           </a:ln>
         </p:spPr>
+        <p:txBody>
+          <a:bodyPr/>
+          <a:lstStyle/>
+          <a:p>
+            <a:endParaRPr lang="en-IN"/>
+          </a:p>
+        </p:txBody>
       </p:sp>
       <p:sp>
         <p:nvSpPr>
@@ -14030,6 +14431,13 @@
             <a:noFill/>
           </a:ln>
         </p:spPr>
+        <p:txBody>
+          <a:bodyPr/>
+          <a:lstStyle/>
+          <a:p>
+            <a:endParaRPr lang="en-IN"/>
+          </a:p>
+        </p:txBody>
       </p:sp>
       <p:sp>
         <p:nvSpPr>
@@ -14052,6 +14460,13 @@
             <a:noFill/>
           </a:ln>
         </p:spPr>
+        <p:txBody>
+          <a:bodyPr/>
+          <a:lstStyle/>
+          <a:p>
+            <a:endParaRPr lang="en-IN"/>
+          </a:p>
+        </p:txBody>
       </p:sp>
       <p:sp>
         <p:nvSpPr>
@@ -14074,6 +14489,13 @@
             <a:noFill/>
           </a:ln>
         </p:spPr>
+        <p:txBody>
+          <a:bodyPr/>
+          <a:lstStyle/>
+          <a:p>
+            <a:endParaRPr lang="en-IN"/>
+          </a:p>
+        </p:txBody>
       </p:sp>
       <p:sp>
         <p:nvSpPr>
@@ -14096,6 +14518,13 @@
             <a:noFill/>
           </a:ln>
         </p:spPr>
+        <p:txBody>
+          <a:bodyPr/>
+          <a:lstStyle/>
+          <a:p>
+            <a:endParaRPr lang="en-IN"/>
+          </a:p>
+        </p:txBody>
       </p:sp>
       <p:sp>
         <p:nvSpPr>
@@ -14117,7 +14546,7 @@
           </a:ln>
         </p:spPr>
         <p:txBody>
-          <a:bodyPr wrap="square" lIns="0" tIns="0" rIns="0" bIns="0" anchor="ctr" rtlCol="0">
+          <a:bodyPr wrap="square" lIns="0" tIns="0" rIns="0" bIns="0" rtlCol="0" anchor="ctr">
             <a:noAutofit/>
           </a:bodyPr>
           <a:lstStyle/>
@@ -14167,7 +14596,7 @@
           </a:ln>
         </p:spPr>
         <p:txBody>
-          <a:bodyPr wrap="square" lIns="0" tIns="0" rIns="0" bIns="0" anchor="t" rtlCol="0">
+          <a:bodyPr wrap="square" lIns="0" tIns="0" rIns="0" bIns="0" rtlCol="0" anchor="t">
             <a:noAutofit/>
           </a:bodyPr>
           <a:lstStyle/>
@@ -14502,7 +14931,7 @@
           </a:ln>
         </p:spPr>
         <p:txBody>
-          <a:bodyPr wrap="square" lIns="0" tIns="0" rIns="0" bIns="0" anchor="ctr" rtlCol="0">
+          <a:bodyPr wrap="square" lIns="0" tIns="0" rIns="0" bIns="0" rtlCol="0" anchor="ctr">
             <a:noAutofit/>
           </a:bodyPr>
           <a:lstStyle/>
@@ -14550,7 +14979,7 @@
           </a:ln>
         </p:spPr>
         <p:txBody>
-          <a:bodyPr wrap="square" lIns="0" tIns="0" rIns="0" bIns="0" anchor="ctr" rtlCol="0">
+          <a:bodyPr wrap="square" lIns="0" tIns="0" rIns="0" bIns="0" rtlCol="0" anchor="ctr">
             <a:noAutofit/>
           </a:bodyPr>
           <a:lstStyle/>
@@ -14610,7 +15039,7 @@
           </a:ln>
         </p:spPr>
         <p:txBody>
-          <a:bodyPr wrap="square" lIns="0" tIns="0" rIns="0" bIns="0" anchor="ctr" rtlCol="0">
+          <a:bodyPr wrap="square" lIns="0" tIns="0" rIns="0" bIns="0" rtlCol="0" anchor="ctr">
             <a:noAutofit/>
           </a:bodyPr>
           <a:lstStyle/>
@@ -14658,7 +15087,7 @@
           </a:ln>
         </p:spPr>
         <p:txBody>
-          <a:bodyPr wrap="square" lIns="0" tIns="0" rIns="0" bIns="0" anchor="ctr" rtlCol="0">
+          <a:bodyPr wrap="square" lIns="0" tIns="0" rIns="0" bIns="0" rtlCol="0" anchor="ctr">
             <a:noAutofit/>
           </a:bodyPr>
           <a:lstStyle/>
@@ -14715,7 +15144,7 @@
           </a:ln>
         </p:spPr>
         <p:txBody>
-          <a:bodyPr wrap="square" lIns="0" tIns="0" rIns="0" bIns="0" anchor="ctr" rtlCol="0">
+          <a:bodyPr wrap="square" lIns="0" tIns="0" rIns="0" bIns="0" rtlCol="0" anchor="ctr">
             <a:noAutofit/>
           </a:bodyPr>
           <a:lstStyle/>
@@ -14763,7 +15192,7 @@
           </a:ln>
         </p:spPr>
         <p:txBody>
-          <a:bodyPr wrap="square" lIns="0" tIns="0" rIns="0" bIns="0" anchor="ctr" rtlCol="0">
+          <a:bodyPr wrap="square" lIns="0" tIns="0" rIns="0" bIns="0" rtlCol="0" anchor="ctr">
             <a:noAutofit/>
           </a:bodyPr>
           <a:lstStyle/>
@@ -14823,7 +15252,7 @@
           </a:ln>
         </p:spPr>
         <p:txBody>
-          <a:bodyPr wrap="square" lIns="0" tIns="0" rIns="0" bIns="0" anchor="ctr" rtlCol="0">
+          <a:bodyPr wrap="square" lIns="0" tIns="0" rIns="0" bIns="0" rtlCol="0" anchor="ctr">
             <a:noAutofit/>
           </a:bodyPr>
           <a:lstStyle/>
@@ -14871,7 +15300,7 @@
           </a:ln>
         </p:spPr>
         <p:txBody>
-          <a:bodyPr wrap="square" lIns="0" tIns="0" rIns="0" bIns="0" anchor="ctr" rtlCol="0">
+          <a:bodyPr wrap="square" lIns="0" tIns="0" rIns="0" bIns="0" rtlCol="0" anchor="ctr">
             <a:noAutofit/>
           </a:bodyPr>
           <a:lstStyle/>
@@ -14928,7 +15357,7 @@
           </a:ln>
         </p:spPr>
         <p:txBody>
-          <a:bodyPr wrap="square" lIns="0" tIns="0" rIns="0" bIns="0" anchor="ctr" rtlCol="0">
+          <a:bodyPr wrap="square" lIns="0" tIns="0" rIns="0" bIns="0" rtlCol="0" anchor="ctr">
             <a:noAutofit/>
           </a:bodyPr>
           <a:lstStyle/>
@@ -14976,7 +15405,7 @@
           </a:ln>
         </p:spPr>
         <p:txBody>
-          <a:bodyPr wrap="square" lIns="0" tIns="0" rIns="0" bIns="0" anchor="ctr" rtlCol="0">
+          <a:bodyPr wrap="square" lIns="0" tIns="0" rIns="0" bIns="0" rtlCol="0" anchor="ctr">
             <a:noAutofit/>
           </a:bodyPr>
           <a:lstStyle/>
@@ -15036,7 +15465,7 @@
           </a:ln>
         </p:spPr>
         <p:txBody>
-          <a:bodyPr wrap="square" lIns="0" tIns="0" rIns="0" bIns="0" anchor="ctr" rtlCol="0">
+          <a:bodyPr wrap="square" lIns="0" tIns="0" rIns="0" bIns="0" rtlCol="0" anchor="ctr">
             <a:noAutofit/>
           </a:bodyPr>
           <a:lstStyle/>
@@ -15084,7 +15513,7 @@
           </a:ln>
         </p:spPr>
         <p:txBody>
-          <a:bodyPr wrap="square" lIns="0" tIns="0" rIns="0" bIns="0" anchor="ctr" rtlCol="0">
+          <a:bodyPr wrap="square" lIns="0" tIns="0" rIns="0" bIns="0" rtlCol="0" anchor="ctr">
             <a:noAutofit/>
           </a:bodyPr>
           <a:lstStyle/>
@@ -15141,7 +15570,7 @@
           </a:ln>
         </p:spPr>
         <p:txBody>
-          <a:bodyPr wrap="square" lIns="0" tIns="0" rIns="0" bIns="0" anchor="ctr" rtlCol="0">
+          <a:bodyPr wrap="square" lIns="0" tIns="0" rIns="0" bIns="0" rtlCol="0" anchor="ctr">
             <a:noAutofit/>
           </a:bodyPr>
           <a:lstStyle/>
@@ -15189,7 +15618,7 @@
           </a:ln>
         </p:spPr>
         <p:txBody>
-          <a:bodyPr wrap="square" lIns="0" tIns="0" rIns="0" bIns="0" anchor="ctr" rtlCol="0">
+          <a:bodyPr wrap="square" lIns="0" tIns="0" rIns="0" bIns="0" rtlCol="0" anchor="ctr">
             <a:noAutofit/>
           </a:bodyPr>
           <a:lstStyle/>
@@ -15240,7 +15669,7 @@
           </a:ln>
         </p:spPr>
         <p:txBody>
-          <a:bodyPr wrap="square" lIns="0" tIns="0" rIns="0" bIns="0" anchor="ctr" rtlCol="0">
+          <a:bodyPr wrap="square" lIns="0" tIns="0" rIns="0" bIns="0" rtlCol="0" anchor="ctr">
             <a:noAutofit/>
           </a:bodyPr>
           <a:lstStyle/>
@@ -15291,7 +15720,7 @@
           </a:ln>
         </p:spPr>
         <p:txBody>
-          <a:bodyPr wrap="square" lIns="0" tIns="0" rIns="0" bIns="0" anchor="ctr" rtlCol="0">
+          <a:bodyPr wrap="square" lIns="0" tIns="0" rIns="0" bIns="0" rtlCol="0" anchor="ctr">
             <a:noAutofit/>
           </a:bodyPr>
           <a:lstStyle/>
@@ -15311,6 +15740,15 @@
               </a:rPr>
               <a:t>6</a:t>
             </a:fld>
+            <a:endParaRPr lang="en-US" sz="1000" dirty="0">
+              <a:solidFill>
+                <a:schemeClr val="tx2">
+                  <a:lumMod val="65000"/>
+                  <a:lumOff val="35000"/>
+                </a:schemeClr>
+              </a:solidFill>
+              <a:latin typeface="+mn-lt"/>
+            </a:endParaRPr>
           </a:p>
         </p:txBody>
       </p:sp>
@@ -15359,7 +15797,7 @@
           </a:ln>
         </p:spPr>
         <p:txBody>
-          <a:bodyPr wrap="square" lIns="0" tIns="0" rIns="0" bIns="0" anchor="ctr" rtlCol="0">
+          <a:bodyPr wrap="square" lIns="0" tIns="0" rIns="0" bIns="0" rtlCol="0" anchor="ctr">
             <a:noAutofit/>
           </a:bodyPr>
           <a:lstStyle/>
@@ -15381,7 +15819,7 @@
                 <a:latin typeface="+mj-lt"/>
                 <a:cs typeface="+mj-lt"/>
               </a:rPr>
-              <a:t>Alternative — Manual String Validation</a:t>
+              <a:t>Alternative : Manual String Validation</a:t>
             </a:r>
             <a:endParaRPr lang="en-US" sz="2600" dirty="0"/>
           </a:p>
@@ -15407,12 +15845,12 @@
           </a:ln>
         </p:spPr>
         <p:txBody>
-          <a:bodyPr wrap="square" lIns="0" tIns="0" rIns="0" bIns="0" anchor="t" rtlCol="0">
+          <a:bodyPr wrap="square" lIns="0" tIns="0" rIns="0" bIns="0" rtlCol="0" anchor="t">
             <a:noAutofit/>
           </a:bodyPr>
           <a:lstStyle/>
           <a:p>
-            <a:pPr algn="l" marL="228600" indent="-228600">
+            <a:pPr marL="228600" indent="-228600" algn="l">
               <a:spcBef>
                 <a:spcPts val="0"/>
               </a:spcBef>
@@ -15438,7 +15876,7 @@
             <a:endParaRPr lang="en-US" sz="1400" dirty="0"/>
           </a:p>
           <a:p>
-            <a:pPr algn="l" marL="228600" indent="-228600">
+            <a:pPr marL="228600" indent="-228600" algn="l">
               <a:spcBef>
                 <a:spcPts val="0"/>
               </a:spcBef>
@@ -15596,7 +16034,7 @@
             <a:endParaRPr lang="en-US" sz="1400" dirty="0"/>
           </a:p>
           <a:p>
-            <a:pPr algn="l" marL="228600" indent="-228600">
+            <a:pPr marL="228600" indent="-228600" algn="l">
               <a:spcBef>
                 <a:spcPts val="0"/>
               </a:spcBef>
@@ -15644,7 +16082,7 @@
             <a:endParaRPr lang="en-US" sz="1400" dirty="0"/>
           </a:p>
           <a:p>
-            <a:pPr algn="l" marL="228600" indent="-228600">
+            <a:pPr marL="228600" indent="-228600" algn="l">
               <a:spcBef>
                 <a:spcPts val="0"/>
               </a:spcBef>
@@ -15690,7 +16128,7 @@
             <a:endParaRPr lang="en-US" sz="1400" dirty="0"/>
           </a:p>
           <a:p>
-            <a:pPr algn="l" marL="228600" indent="-228600">
+            <a:pPr marL="228600" indent="-228600" algn="l">
               <a:spcBef>
                 <a:spcPts val="0"/>
               </a:spcBef>
@@ -15716,7 +16154,7 @@
             <a:endParaRPr lang="en-US" sz="1400" dirty="0"/>
           </a:p>
           <a:p>
-            <a:pPr algn="l" marL="228600" indent="-228600">
+            <a:pPr marL="228600" indent="-228600" algn="l">
               <a:spcBef>
                 <a:spcPts val="0"/>
               </a:spcBef>
@@ -15766,6 +16204,13 @@
             <a:noFill/>
           </a:ln>
         </p:spPr>
+        <p:txBody>
+          <a:bodyPr/>
+          <a:lstStyle/>
+          <a:p>
+            <a:endParaRPr lang="en-IN"/>
+          </a:p>
+        </p:txBody>
       </p:sp>
       <p:sp>
         <p:nvSpPr>
@@ -15793,6 +16238,13 @@
             <a:noFill/>
           </a:ln>
         </p:spPr>
+        <p:txBody>
+          <a:bodyPr/>
+          <a:lstStyle/>
+          <a:p>
+            <a:endParaRPr lang="en-IN"/>
+          </a:p>
+        </p:txBody>
       </p:sp>
       <p:sp>
         <p:nvSpPr>
@@ -15815,6 +16267,13 @@
             <a:noFill/>
           </a:ln>
         </p:spPr>
+        <p:txBody>
+          <a:bodyPr/>
+          <a:lstStyle/>
+          <a:p>
+            <a:endParaRPr lang="en-IN"/>
+          </a:p>
+        </p:txBody>
       </p:sp>
       <p:sp>
         <p:nvSpPr>
@@ -15837,6 +16296,13 @@
             <a:noFill/>
           </a:ln>
         </p:spPr>
+        <p:txBody>
+          <a:bodyPr/>
+          <a:lstStyle/>
+          <a:p>
+            <a:endParaRPr lang="en-IN"/>
+          </a:p>
+        </p:txBody>
       </p:sp>
       <p:sp>
         <p:nvSpPr>
@@ -15859,6 +16325,13 @@
             <a:noFill/>
           </a:ln>
         </p:spPr>
+        <p:txBody>
+          <a:bodyPr/>
+          <a:lstStyle/>
+          <a:p>
+            <a:endParaRPr lang="en-IN"/>
+          </a:p>
+        </p:txBody>
       </p:sp>
       <p:sp>
         <p:nvSpPr>
@@ -15880,7 +16353,7 @@
           </a:ln>
         </p:spPr>
         <p:txBody>
-          <a:bodyPr wrap="square" lIns="0" tIns="0" rIns="0" bIns="0" anchor="ctr" rtlCol="0">
+          <a:bodyPr wrap="square" lIns="0" tIns="0" rIns="0" bIns="0" rtlCol="0" anchor="ctr">
             <a:noAutofit/>
           </a:bodyPr>
           <a:lstStyle/>
@@ -15930,7 +16403,7 @@
           </a:ln>
         </p:spPr>
         <p:txBody>
-          <a:bodyPr wrap="square" lIns="0" tIns="0" rIns="0" bIns="0" anchor="t" rtlCol="0">
+          <a:bodyPr wrap="square" lIns="0" tIns="0" rIns="0" bIns="0" rtlCol="0" anchor="t">
             <a:noAutofit/>
           </a:bodyPr>
           <a:lstStyle/>
@@ -16774,7 +17247,7 @@
           </a:ln>
         </p:spPr>
         <p:txBody>
-          <a:bodyPr wrap="square" lIns="109728" tIns="18288" rIns="45720" bIns="18288" anchor="ctr" rtlCol="0">
+          <a:bodyPr wrap="square" lIns="109728" tIns="18288" rIns="45720" bIns="18288" rtlCol="0" anchor="ctr">
             <a:noAutofit/>
           </a:bodyPr>
           <a:lstStyle/>
@@ -16877,7 +17350,7 @@
           </a:ln>
         </p:spPr>
         <p:txBody>
-          <a:bodyPr wrap="square" lIns="109728" tIns="18288" rIns="45720" bIns="18288" anchor="ctr" rtlCol="0">
+          <a:bodyPr wrap="square" lIns="109728" tIns="18288" rIns="45720" bIns="18288" rtlCol="0" anchor="ctr">
             <a:noAutofit/>
           </a:bodyPr>
           <a:lstStyle/>
@@ -16980,7 +17453,7 @@
           </a:ln>
         </p:spPr>
         <p:txBody>
-          <a:bodyPr wrap="square" lIns="109728" tIns="18288" rIns="45720" bIns="18288" anchor="ctr" rtlCol="0">
+          <a:bodyPr wrap="square" lIns="109728" tIns="18288" rIns="45720" bIns="18288" rtlCol="0" anchor="ctr">
             <a:noAutofit/>
           </a:bodyPr>
           <a:lstStyle/>
@@ -17078,7 +17551,7 @@
           </a:ln>
         </p:spPr>
         <p:txBody>
-          <a:bodyPr wrap="square" lIns="91440" tIns="45720" rIns="91440" bIns="45720" anchor="ctr" rtlCol="0">
+          <a:bodyPr wrap="square" lIns="91440" tIns="45720" rIns="91440" bIns="45720" rtlCol="0" anchor="ctr">
             <a:noAutofit/>
           </a:bodyPr>
           <a:lstStyle/>
@@ -17126,7 +17599,7 @@
           </a:ln>
         </p:spPr>
         <p:txBody>
-          <a:bodyPr wrap="square" lIns="0" tIns="0" rIns="0" bIns="0" anchor="ctr" rtlCol="0">
+          <a:bodyPr wrap="square" lIns="0" tIns="0" rIns="0" bIns="0" rtlCol="0" anchor="ctr">
             <a:noAutofit/>
           </a:bodyPr>
           <a:lstStyle/>
@@ -17177,7 +17650,7 @@
           </a:ln>
         </p:spPr>
         <p:txBody>
-          <a:bodyPr wrap="square" lIns="0" tIns="0" rIns="0" bIns="0" anchor="ctr" rtlCol="0">
+          <a:bodyPr wrap="square" lIns="0" tIns="0" rIns="0" bIns="0" rtlCol="0" anchor="ctr">
             <a:noAutofit/>
           </a:bodyPr>
           <a:lstStyle/>
@@ -17197,6 +17670,15 @@
               </a:rPr>
               <a:t>7</a:t>
             </a:fld>
+            <a:endParaRPr lang="en-US" sz="1000" dirty="0">
+              <a:solidFill>
+                <a:schemeClr val="tx2">
+                  <a:lumMod val="65000"/>
+                  <a:lumOff val="35000"/>
+                </a:schemeClr>
+              </a:solidFill>
+              <a:latin typeface="+mn-lt"/>
+            </a:endParaRPr>
           </a:p>
         </p:txBody>
       </p:sp>
@@ -17245,7 +17727,7 @@
           </a:ln>
         </p:spPr>
         <p:txBody>
-          <a:bodyPr wrap="square" lIns="0" tIns="0" rIns="0" bIns="0" anchor="ctr" rtlCol="0">
+          <a:bodyPr wrap="square" lIns="0" tIns="0" rIns="0" bIns="0" rtlCol="0" anchor="ctr">
             <a:noAutofit/>
           </a:bodyPr>
           <a:lstStyle/>
@@ -17299,7 +17781,7 @@
           </a:ln>
         </p:spPr>
         <p:txBody>
-          <a:bodyPr wrap="square" lIns="0" tIns="0" rIns="0" bIns="0" anchor="ctr" rtlCol="0">
+          <a:bodyPr wrap="square" lIns="0" tIns="0" rIns="0" bIns="0" rtlCol="0" anchor="ctr">
             <a:noAutofit/>
           </a:bodyPr>
           <a:lstStyle/>
@@ -17378,7 +17860,7 @@
           </a:ln>
         </p:spPr>
         <p:txBody>
-          <a:bodyPr wrap="square" lIns="0" tIns="0" rIns="0" bIns="0" anchor="ctr" rtlCol="0">
+          <a:bodyPr wrap="square" lIns="0" tIns="0" rIns="0" bIns="0" rtlCol="0" anchor="ctr">
             <a:noAutofit/>
           </a:bodyPr>
           <a:lstStyle/>
@@ -17433,7 +17915,7 @@
           </a:ln>
         </p:spPr>
         <p:txBody>
-          <a:bodyPr wrap="none" lIns="0" tIns="0" rIns="0" bIns="0" anchor="ctr" rtlCol="0">
+          <a:bodyPr wrap="none" lIns="0" tIns="0" rIns="0" bIns="0" rtlCol="0" anchor="ctr">
             <a:noAutofit/>
           </a:bodyPr>
           <a:lstStyle/>
@@ -17510,7 +17992,7 @@
           </a:ln>
         </p:spPr>
         <p:txBody>
-          <a:bodyPr wrap="none" lIns="0" tIns="0" rIns="0" bIns="0" anchor="ctr" rtlCol="0">
+          <a:bodyPr wrap="none" lIns="0" tIns="0" rIns="0" bIns="0" rtlCol="0" anchor="ctr">
             <a:noAutofit/>
           </a:bodyPr>
           <a:lstStyle/>
@@ -17587,7 +18069,7 @@
           </a:ln>
         </p:spPr>
         <p:txBody>
-          <a:bodyPr wrap="none" lIns="0" tIns="0" rIns="0" bIns="0" anchor="ctr" rtlCol="0">
+          <a:bodyPr wrap="none" lIns="0" tIns="0" rIns="0" bIns="0" rtlCol="0" anchor="ctr">
             <a:noAutofit/>
           </a:bodyPr>
           <a:lstStyle/>
@@ -17663,7 +18145,7 @@
           </a:ln>
         </p:spPr>
         <p:txBody>
-          <a:bodyPr wrap="square" lIns="0" tIns="0" rIns="0" bIns="0" anchor="ctr" rtlCol="0">
+          <a:bodyPr wrap="square" lIns="0" tIns="0" rIns="0" bIns="0" rtlCol="0" anchor="ctr">
             <a:noAutofit/>
           </a:bodyPr>
           <a:lstStyle/>
@@ -17821,7 +18303,7 @@
           </a:ln>
         </p:spPr>
         <p:txBody>
-          <a:bodyPr wrap="square" lIns="0" tIns="0" rIns="0" bIns="0" anchor="ctr" rtlCol="0">
+          <a:bodyPr wrap="square" lIns="0" tIns="0" rIns="0" bIns="0" rtlCol="0" anchor="ctr">
             <a:noAutofit/>
           </a:bodyPr>
           <a:lstStyle/>
@@ -17871,7 +18353,7 @@
           </a:ln>
         </p:spPr>
         <p:txBody>
-          <a:bodyPr wrap="square" lIns="0" tIns="0" rIns="0" bIns="0" anchor="ctr" rtlCol="0">
+          <a:bodyPr wrap="square" lIns="0" tIns="0" rIns="0" bIns="0" rtlCol="0" anchor="ctr">
             <a:noAutofit/>
           </a:bodyPr>
           <a:lstStyle/>
@@ -17921,7 +18403,7 @@
           </a:ln>
         </p:spPr>
         <p:txBody>
-          <a:bodyPr wrap="none" lIns="0" tIns="0" rIns="0" bIns="0" anchor="ctr" rtlCol="0">
+          <a:bodyPr wrap="none" lIns="0" tIns="0" rIns="0" bIns="0" rtlCol="0" anchor="ctr">
             <a:noAutofit/>
           </a:bodyPr>
           <a:lstStyle/>
@@ -17980,7 +18462,7 @@
           </a:ln>
         </p:spPr>
         <p:txBody>
-          <a:bodyPr wrap="square" lIns="91440" tIns="45720" rIns="91440" bIns="45720" anchor="ctr" rtlCol="0">
+          <a:bodyPr wrap="square" lIns="91440" tIns="45720" rIns="91440" bIns="45720" rtlCol="0" anchor="ctr">
             <a:noAutofit/>
           </a:bodyPr>
           <a:lstStyle/>
@@ -18052,7 +18534,7 @@
           </a:ln>
         </p:spPr>
         <p:txBody>
-          <a:bodyPr wrap="square" lIns="0" tIns="0" rIns="0" bIns="0" anchor="ctr" rtlCol="0">
+          <a:bodyPr wrap="square" lIns="0" tIns="0" rIns="0" bIns="0" rtlCol="0" anchor="ctr">
             <a:noAutofit/>
           </a:bodyPr>
           <a:lstStyle/>
@@ -18124,7 +18606,7 @@
           </a:ln>
         </p:spPr>
         <p:txBody>
-          <a:bodyPr wrap="square" lIns="0" tIns="0" rIns="0" bIns="0" anchor="ctr" rtlCol="0">
+          <a:bodyPr wrap="square" lIns="0" tIns="0" rIns="0" bIns="0" rtlCol="0" anchor="ctr">
             <a:noAutofit/>
           </a:bodyPr>
           <a:lstStyle/>
@@ -18196,7 +18678,7 @@
           </a:ln>
         </p:spPr>
         <p:txBody>
-          <a:bodyPr wrap="square" lIns="0" tIns="0" rIns="0" bIns="0" anchor="ctr" rtlCol="0">
+          <a:bodyPr wrap="square" lIns="0" tIns="0" rIns="0" bIns="0" rtlCol="0" anchor="ctr">
             <a:noAutofit/>
           </a:bodyPr>
           <a:lstStyle/>
@@ -18252,7 +18734,7 @@
           </a:ln>
         </p:spPr>
         <p:txBody>
-          <a:bodyPr wrap="square" lIns="27432" tIns="0" rIns="27432" bIns="0" anchor="ctr" rtlCol="0">
+          <a:bodyPr wrap="square" lIns="27432" tIns="0" rIns="27432" bIns="0" rtlCol="0" anchor="ctr">
             <a:noAutofit/>
           </a:bodyPr>
           <a:lstStyle/>
@@ -18322,12 +18804,12 @@
           </a:ln>
         </p:spPr>
         <p:txBody>
-          <a:bodyPr wrap="square" lIns="0" tIns="0" rIns="0" bIns="0" anchor="t" rtlCol="0">
+          <a:bodyPr wrap="square" lIns="0" tIns="0" rIns="0" bIns="0" rtlCol="0" anchor="t">
             <a:noAutofit/>
           </a:bodyPr>
           <a:lstStyle/>
           <a:p>
-            <a:pPr algn="l" marL="228600" indent="-228600">
+            <a:pPr marL="228600" indent="-228600" algn="l">
               <a:spcBef>
                 <a:spcPts val="0"/>
               </a:spcBef>
@@ -18373,7 +18855,7 @@
             <a:endParaRPr lang="en-US" sz="1400" dirty="0"/>
           </a:p>
           <a:p>
-            <a:pPr algn="l" marL="228600" indent="-228600">
+            <a:pPr marL="228600" indent="-228600" algn="l">
               <a:spcBef>
                 <a:spcPts val="0"/>
               </a:spcBef>
@@ -18409,7 +18891,7 @@
             <a:endParaRPr lang="en-US" sz="1400" dirty="0"/>
           </a:p>
           <a:p>
-            <a:pPr algn="l" marL="228600" indent="-228600">
+            <a:pPr marL="228600" indent="-228600" algn="l">
               <a:spcBef>
                 <a:spcPts val="0"/>
               </a:spcBef>
@@ -18456,12 +18938,12 @@
           </a:ln>
         </p:spPr>
         <p:txBody>
-          <a:bodyPr wrap="square" lIns="0" tIns="0" rIns="0" bIns="0" anchor="t" rtlCol="0">
+          <a:bodyPr wrap="square" lIns="0" tIns="0" rIns="0" bIns="0" rtlCol="0" anchor="t">
             <a:noAutofit/>
           </a:bodyPr>
           <a:lstStyle/>
           <a:p>
-            <a:pPr algn="l" marL="228600" indent="-228600">
+            <a:pPr marL="228600" indent="-228600" algn="l">
               <a:spcBef>
                 <a:spcPts val="0"/>
               </a:spcBef>
@@ -18507,7 +18989,7 @@
             <a:endParaRPr lang="en-US" sz="1400" dirty="0"/>
           </a:p>
           <a:p>
-            <a:pPr algn="l" marL="228600" indent="-228600">
+            <a:pPr marL="228600" indent="-228600" algn="l">
               <a:spcBef>
                 <a:spcPts val="0"/>
               </a:spcBef>
@@ -18555,7 +19037,7 @@
             <a:endParaRPr lang="en-US" sz="1400" dirty="0"/>
           </a:p>
           <a:p>
-            <a:pPr algn="l" marL="228600" indent="-228600">
+            <a:pPr marL="228600" indent="-228600" algn="l">
               <a:spcBef>
                 <a:spcPts val="0"/>
               </a:spcBef>
@@ -18602,7 +19084,7 @@
           </a:ln>
         </p:spPr>
         <p:txBody>
-          <a:bodyPr wrap="square" lIns="0" tIns="0" rIns="0" bIns="0" anchor="ctr" rtlCol="0">
+          <a:bodyPr wrap="square" lIns="0" tIns="0" rIns="0" bIns="0" rtlCol="0" anchor="ctr">
             <a:noAutofit/>
           </a:bodyPr>
           <a:lstStyle/>
@@ -18653,7 +19135,7 @@
           </a:ln>
         </p:spPr>
         <p:txBody>
-          <a:bodyPr wrap="square" lIns="0" tIns="0" rIns="0" bIns="0" anchor="ctr" rtlCol="0">
+          <a:bodyPr wrap="square" lIns="0" tIns="0" rIns="0" bIns="0" rtlCol="0" anchor="ctr">
             <a:noAutofit/>
           </a:bodyPr>
           <a:lstStyle/>
@@ -18673,6 +19155,15 @@
               </a:rPr>
               <a:t>8</a:t>
             </a:fld>
+            <a:endParaRPr lang="en-US" sz="1000" dirty="0">
+              <a:solidFill>
+                <a:schemeClr val="tx2">
+                  <a:lumMod val="65000"/>
+                  <a:lumOff val="35000"/>
+                </a:schemeClr>
+              </a:solidFill>
+              <a:latin typeface="+mn-lt"/>
+            </a:endParaRPr>
           </a:p>
         </p:txBody>
       </p:sp>
@@ -18721,7 +19212,7 @@
           </a:ln>
         </p:spPr>
         <p:txBody>
-          <a:bodyPr wrap="square" lIns="0" tIns="0" rIns="0" bIns="0" anchor="ctr" rtlCol="0">
+          <a:bodyPr wrap="square" lIns="0" tIns="0" rIns="0" bIns="0" rtlCol="0" anchor="ctr">
             <a:noAutofit/>
           </a:bodyPr>
           <a:lstStyle/>
@@ -18743,7 +19234,7 @@
                 <a:latin typeface="+mj-lt"/>
                 <a:cs typeface="+mj-lt"/>
               </a:rPr>
-              <a:t>Code Walkthrough — A Clean Class Design</a:t>
+              <a:t>Code Walkthrough : A Clean Class Design</a:t>
             </a:r>
             <a:endParaRPr lang="en-US" sz="2600" dirty="0"/>
           </a:p>
@@ -18769,12 +19260,12 @@
           </a:ln>
         </p:spPr>
         <p:txBody>
-          <a:bodyPr wrap="square" lIns="0" tIns="0" rIns="0" bIns="0" anchor="t" rtlCol="0">
+          <a:bodyPr wrap="square" lIns="0" tIns="0" rIns="0" bIns="0" rtlCol="0" anchor="t">
             <a:noAutofit/>
           </a:bodyPr>
           <a:lstStyle/>
           <a:p>
-            <a:pPr algn="l" marL="228600" indent="-228600">
+            <a:pPr marL="228600" indent="-228600" algn="l">
               <a:spcBef>
                 <a:spcPts val="0"/>
               </a:spcBef>
@@ -18795,12 +19286,12 @@
                 <a:latin typeface="+mn-lt"/>
                 <a:cs typeface="+mn-lt"/>
               </a:rPr>
-              <a:t>Encapsulate the rules in a class — cohesive and reusable.</a:t>
+              <a:t>Encapsulate the rules in a class : cohesive and reusable.</a:t>
             </a:r>
             <a:endParaRPr lang="en-US" sz="1400" dirty="0"/>
           </a:p>
           <a:p>
-            <a:pPr algn="l" marL="228600" indent="-228600">
+            <a:pPr marL="228600" indent="-228600" algn="l">
               <a:spcBef>
                 <a:spcPts val="0"/>
               </a:spcBef>
@@ -18914,7 +19405,7 @@
             <a:endParaRPr lang="en-US" sz="1400" dirty="0"/>
           </a:p>
           <a:p>
-            <a:pPr algn="l" marL="228600" indent="-228600">
+            <a:pPr marL="228600" indent="-228600" algn="l">
               <a:spcBef>
                 <a:spcPts val="0"/>
               </a:spcBef>
@@ -18984,7 +19475,7 @@
         <p:spPr>
           <a:xfrm>
             <a:off x="4800600" y="1325880"/>
-            <a:ext cx="4114800" cy="1645920"/>
+            <a:ext cx="4114800" cy="1399032"/>
           </a:xfrm>
           <a:prstGeom prst="rect">
             <a:avLst/>
@@ -18995,12 +19486,12 @@
           </a:ln>
         </p:spPr>
         <p:txBody>
-          <a:bodyPr wrap="square" lIns="0" tIns="0" rIns="0" bIns="0" anchor="t" rtlCol="0">
+          <a:bodyPr wrap="square" lIns="0" tIns="0" rIns="0" bIns="0" rtlCol="0" anchor="t">
             <a:noAutofit/>
           </a:bodyPr>
           <a:lstStyle/>
           <a:p>
-            <a:pPr algn="l" marL="228600" indent="-228600">
+            <a:pPr marL="228600" indent="-228600" algn="l">
               <a:spcBef>
                 <a:spcPts val="0"/>
               </a:spcBef>
@@ -19150,7 +19641,7 @@
             <a:endParaRPr lang="en-US" sz="1400" dirty="0"/>
           </a:p>
           <a:p>
-            <a:pPr algn="l" marL="228600" indent="-228600">
+            <a:pPr marL="228600" indent="-228600" algn="l">
               <a:spcBef>
                 <a:spcPts val="0"/>
               </a:spcBef>
@@ -19176,7 +19667,7 @@
             <a:endParaRPr lang="en-US" sz="1400" dirty="0"/>
           </a:p>
           <a:p>
-            <a:pPr algn="l" marL="228600" indent="-228600">
+            <a:pPr marL="228600" indent="-228600" algn="l">
               <a:spcBef>
                 <a:spcPts val="0"/>
               </a:spcBef>
@@ -19226,6 +19717,13 @@
             <a:noFill/>
           </a:ln>
         </p:spPr>
+        <p:txBody>
+          <a:bodyPr/>
+          <a:lstStyle/>
+          <a:p>
+            <a:endParaRPr lang="en-IN"/>
+          </a:p>
+        </p:txBody>
       </p:sp>
       <p:sp>
         <p:nvSpPr>
@@ -19253,6 +19751,13 @@
             <a:noFill/>
           </a:ln>
         </p:spPr>
+        <p:txBody>
+          <a:bodyPr/>
+          <a:lstStyle/>
+          <a:p>
+            <a:endParaRPr lang="en-IN"/>
+          </a:p>
+        </p:txBody>
       </p:sp>
       <p:sp>
         <p:nvSpPr>
@@ -19275,6 +19780,13 @@
             <a:noFill/>
           </a:ln>
         </p:spPr>
+        <p:txBody>
+          <a:bodyPr/>
+          <a:lstStyle/>
+          <a:p>
+            <a:endParaRPr lang="en-IN"/>
+          </a:p>
+        </p:txBody>
       </p:sp>
       <p:sp>
         <p:nvSpPr>
@@ -19297,6 +19809,13 @@
             <a:noFill/>
           </a:ln>
         </p:spPr>
+        <p:txBody>
+          <a:bodyPr/>
+          <a:lstStyle/>
+          <a:p>
+            <a:endParaRPr lang="en-IN"/>
+          </a:p>
+        </p:txBody>
       </p:sp>
       <p:sp>
         <p:nvSpPr>
@@ -19319,6 +19838,13 @@
             <a:noFill/>
           </a:ln>
         </p:spPr>
+        <p:txBody>
+          <a:bodyPr/>
+          <a:lstStyle/>
+          <a:p>
+            <a:endParaRPr lang="en-IN"/>
+          </a:p>
+        </p:txBody>
       </p:sp>
       <p:sp>
         <p:nvSpPr>
@@ -19340,7 +19866,7 @@
           </a:ln>
         </p:spPr>
         <p:txBody>
-          <a:bodyPr wrap="square" lIns="0" tIns="0" rIns="0" bIns="0" anchor="ctr" rtlCol="0">
+          <a:bodyPr wrap="square" lIns="0" tIns="0" rIns="0" bIns="0" rtlCol="0" anchor="ctr">
             <a:noAutofit/>
           </a:bodyPr>
           <a:lstStyle/>
@@ -19390,7 +19916,7 @@
           </a:ln>
         </p:spPr>
         <p:txBody>
-          <a:bodyPr wrap="square" lIns="0" tIns="0" rIns="0" bIns="0" anchor="t" rtlCol="0">
+          <a:bodyPr wrap="square" lIns="0" tIns="0" rIns="0" bIns="0" rtlCol="0" anchor="t">
             <a:noAutofit/>
           </a:bodyPr>
           <a:lstStyle/>
@@ -19425,7 +19951,27 @@
                 <a:latin typeface="Courier New"/>
                 <a:cs typeface="Courier New"/>
               </a:rPr>
-              <a:t> dataclasses </a:t>
+              <a:t> </a:t>
+            </a:r>
+            <a:r>
+              <a:rPr lang="en-US" sz="1000" b="0" i="0" dirty="0" err="1">
+                <a:solidFill>
+                  <a:schemeClr val="bg2"/>
+                </a:solidFill>
+                <a:latin typeface="Courier New"/>
+                <a:cs typeface="Courier New"/>
+              </a:rPr>
+              <a:t>dataclasses</a:t>
+            </a:r>
+            <a:r>
+              <a:rPr lang="en-US" sz="1000" b="0" i="0" dirty="0">
+                <a:solidFill>
+                  <a:schemeClr val="bg2"/>
+                </a:solidFill>
+                <a:latin typeface="Courier New"/>
+                <a:cs typeface="Courier New"/>
+              </a:rPr>
+              <a:t> </a:t>
             </a:r>
             <a:r>
               <a:rPr lang="en-US" sz="1000" b="1" i="0" dirty="0">
@@ -19445,7 +19991,17 @@
                 <a:latin typeface="Courier New"/>
                 <a:cs typeface="Courier New"/>
               </a:rPr>
-              <a:t> dataclass</a:t>
+              <a:t> </a:t>
+            </a:r>
+            <a:r>
+              <a:rPr lang="en-US" sz="1000" b="0" i="0" dirty="0" err="1">
+                <a:solidFill>
+                  <a:schemeClr val="bg2"/>
+                </a:solidFill>
+                <a:latin typeface="Courier New"/>
+                <a:cs typeface="Courier New"/>
+              </a:rPr>
+              <a:t>dataclass</a:t>
             </a:r>
             <a:endParaRPr lang="en-US" sz="1000" dirty="0"/>
           </a:p>
@@ -19571,7 +20127,7 @@
               <a:t> </a:t>
             </a:r>
             <a:r>
-              <a:rPr lang="en-US" sz="1000" b="0" i="0" dirty="0">
+              <a:rPr lang="en-US" sz="1000" b="0" i="0" dirty="0" err="1">
                 <a:solidFill>
                   <a:schemeClr val="accent4">
                     <a:lumMod val="75000"/>
@@ -19740,7 +20296,7 @@
               <a:t> </a:t>
             </a:r>
             <a:r>
-              <a:rPr lang="en-US" sz="1000" b="0" i="0" dirty="0">
+              <a:rPr lang="en-US" sz="1000" b="0" i="0" dirty="0" err="1">
                 <a:solidFill>
                   <a:schemeClr val="accent4">
                     <a:lumMod val="75000"/>
@@ -19788,7 +20344,7 @@
               <a:t>    PATTERN = </a:t>
             </a:r>
             <a:r>
-              <a:rPr lang="en-US" sz="1000" b="0" i="0" dirty="0">
+              <a:rPr lang="en-US" sz="1000" b="0" i="0" dirty="0" err="1">
                 <a:solidFill>
                   <a:schemeClr val="accent1">
                     <a:lumMod val="55000"/>
@@ -19801,6 +20357,16 @@
               <a:t>re</a:t>
             </a:r>
             <a:r>
+              <a:rPr lang="en-US" sz="1000" b="0" i="0" dirty="0" err="1">
+                <a:solidFill>
+                  <a:schemeClr val="bg2"/>
+                </a:solidFill>
+                <a:latin typeface="Courier New"/>
+                <a:cs typeface="Courier New"/>
+              </a:rPr>
+              <a:t>.compile</a:t>
+            </a:r>
+            <a:r>
               <a:rPr lang="en-US" sz="1000" b="0" i="0" dirty="0">
                 <a:solidFill>
                   <a:schemeClr val="bg2"/>
@@ -19808,7 +20374,7 @@
                 <a:latin typeface="Courier New"/>
                 <a:cs typeface="Courier New"/>
               </a:rPr>
-              <a:t>.compile(</a:t>
+              <a:t>(</a:t>
             </a:r>
             <a:endParaRPr lang="en-US" sz="1000" dirty="0"/>
           </a:p>
@@ -19931,7 +20497,7 @@
               <a:t> </a:t>
             </a:r>
             <a:r>
-              <a:rPr lang="en-US" sz="1000" b="0" i="0" dirty="0">
+              <a:rPr lang="en-US" sz="1000" b="0" i="0" dirty="0" err="1">
                 <a:solidFill>
                   <a:schemeClr val="accent4">
                     <a:lumMod val="75000"/>
@@ -20042,7 +20608,27 @@
                 <a:latin typeface="Courier New"/>
                 <a:cs typeface="Courier New"/>
               </a:rPr>
-              <a:t>        local, _, domain = email.strip().partition(</a:t>
+              <a:t>        local, _, domain = </a:t>
+            </a:r>
+            <a:r>
+              <a:rPr lang="en-US" sz="1000" b="0" i="0" dirty="0" err="1">
+                <a:solidFill>
+                  <a:schemeClr val="bg2"/>
+                </a:solidFill>
+                <a:latin typeface="Courier New"/>
+                <a:cs typeface="Courier New"/>
+              </a:rPr>
+              <a:t>email.strip</a:t>
+            </a:r>
+            <a:r>
+              <a:rPr lang="en-US" sz="1000" b="0" i="0" dirty="0">
+                <a:solidFill>
+                  <a:schemeClr val="bg2"/>
+                </a:solidFill>
+                <a:latin typeface="Courier New"/>
+                <a:cs typeface="Courier New"/>
+              </a:rPr>
+              <a:t>().partition(</a:t>
             </a:r>
             <a:r>
               <a:rPr lang="en-US" sz="1000" b="0" i="0" dirty="0">
@@ -20243,7 +20829,27 @@
                 <a:latin typeface="Courier New"/>
                 <a:cs typeface="Courier New"/>
               </a:rPr>
-              <a:t>) -&gt; ValidationResult:</a:t>
+              <a:t>) -&gt; </a:t>
+            </a:r>
+            <a:r>
+              <a:rPr lang="en-US" sz="1000" b="0" i="0" dirty="0" err="1">
+                <a:solidFill>
+                  <a:schemeClr val="bg2"/>
+                </a:solidFill>
+                <a:latin typeface="Courier New"/>
+                <a:cs typeface="Courier New"/>
+              </a:rPr>
+              <a:t>ValidationResult</a:t>
+            </a:r>
+            <a:r>
+              <a:rPr lang="en-US" sz="1000" b="0" i="0" dirty="0">
+                <a:solidFill>
+                  <a:schemeClr val="bg2"/>
+                </a:solidFill>
+                <a:latin typeface="Courier New"/>
+                <a:cs typeface="Courier New"/>
+              </a:rPr>
+              <a:t>:</a:t>
             </a:r>
             <a:endParaRPr lang="en-US" sz="1000" dirty="0"/>
           </a:p>
@@ -20271,7 +20877,7 @@
               <a:t>        email = </a:t>
             </a:r>
             <a:r>
-              <a:rPr lang="en-US" sz="1000" b="1" i="0" dirty="0">
+              <a:rPr lang="en-US" sz="1000" b="1" i="0" dirty="0" err="1">
                 <a:solidFill>
                   <a:schemeClr val="accent1"/>
                 </a:solidFill>
@@ -20281,6 +20887,16 @@
               <a:t>self</a:t>
             </a:r>
             <a:r>
+              <a:rPr lang="en-US" sz="1000" b="0" i="0" dirty="0" err="1">
+                <a:solidFill>
+                  <a:schemeClr val="bg2"/>
+                </a:solidFill>
+                <a:latin typeface="Courier New"/>
+                <a:cs typeface="Courier New"/>
+              </a:rPr>
+              <a:t>.normalise</a:t>
+            </a:r>
+            <a:r>
               <a:rPr lang="en-US" sz="1000" b="0" i="0" dirty="0">
                 <a:solidFill>
                   <a:schemeClr val="bg2"/>
@@ -20288,7 +20904,7 @@
                 <a:latin typeface="Courier New"/>
                 <a:cs typeface="Courier New"/>
               </a:rPr>
-              <a:t>.normalise(email)</a:t>
+              <a:t>(email)</a:t>
             </a:r>
             <a:endParaRPr lang="en-US" sz="1000" dirty="0"/>
           </a:p>
@@ -20356,7 +20972,7 @@
               <a:t> </a:t>
             </a:r>
             <a:r>
-              <a:rPr lang="en-US" sz="1000" b="1" i="0" dirty="0">
+              <a:rPr lang="en-US" sz="1000" b="1" i="0" dirty="0" err="1">
                 <a:solidFill>
                   <a:schemeClr val="accent1"/>
                 </a:solidFill>
@@ -20366,6 +20982,16 @@
               <a:t>self</a:t>
             </a:r>
             <a:r>
+              <a:rPr lang="en-US" sz="1000" b="0" i="0" dirty="0" err="1">
+                <a:solidFill>
+                  <a:schemeClr val="bg2"/>
+                </a:solidFill>
+                <a:latin typeface="Courier New"/>
+                <a:cs typeface="Courier New"/>
+              </a:rPr>
+              <a:t>.PATTERN.fullmatch</a:t>
+            </a:r>
+            <a:r>
               <a:rPr lang="en-US" sz="1000" b="0" i="0" dirty="0">
                 <a:solidFill>
                   <a:schemeClr val="bg2"/>
@@ -20373,7 +20999,7 @@
                 <a:latin typeface="Courier New"/>
                 <a:cs typeface="Courier New"/>
               </a:rPr>
-              <a:t>.PATTERN.fullmatch(email):</a:t>
+              <a:t>(email):</a:t>
             </a:r>
             <a:endParaRPr lang="en-US" sz="1000" dirty="0"/>
           </a:p>
@@ -20418,7 +21044,27 @@
                 <a:latin typeface="Courier New"/>
                 <a:cs typeface="Courier New"/>
               </a:rPr>
-              <a:t> ValidationResult(</a:t>
+              <a:t> </a:t>
+            </a:r>
+            <a:r>
+              <a:rPr lang="en-US" sz="1000" b="0" i="0" dirty="0" err="1">
+                <a:solidFill>
+                  <a:schemeClr val="bg2"/>
+                </a:solidFill>
+                <a:latin typeface="Courier New"/>
+                <a:cs typeface="Courier New"/>
+              </a:rPr>
+              <a:t>ValidationResult</a:t>
+            </a:r>
+            <a:r>
+              <a:rPr lang="en-US" sz="1000" b="0" i="0" dirty="0">
+                <a:solidFill>
+                  <a:schemeClr val="bg2"/>
+                </a:solidFill>
+                <a:latin typeface="Courier New"/>
+                <a:cs typeface="Courier New"/>
+              </a:rPr>
+              <a:t>(</a:t>
             </a:r>
             <a:r>
               <a:rPr lang="en-US" sz="1000" b="1" i="0" dirty="0">
@@ -20503,7 +21149,27 @@
                 <a:latin typeface="Courier New"/>
                 <a:cs typeface="Courier New"/>
               </a:rPr>
-              <a:t> ValidationResult(</a:t>
+              <a:t> </a:t>
+            </a:r>
+            <a:r>
+              <a:rPr lang="en-US" sz="1000" b="0" i="0" dirty="0" err="1">
+                <a:solidFill>
+                  <a:schemeClr val="bg2"/>
+                </a:solidFill>
+                <a:latin typeface="Courier New"/>
+                <a:cs typeface="Courier New"/>
+              </a:rPr>
+              <a:t>ValidationResult</a:t>
+            </a:r>
+            <a:r>
+              <a:rPr lang="en-US" sz="1000" b="0" i="0" dirty="0">
+                <a:solidFill>
+                  <a:schemeClr val="bg2"/>
+                </a:solidFill>
+                <a:latin typeface="Courier New"/>
+                <a:cs typeface="Courier New"/>
+              </a:rPr>
+              <a:t>(</a:t>
             </a:r>
             <a:r>
               <a:rPr lang="en-US" sz="1000" b="1" i="0" dirty="0">
@@ -20555,7 +21221,7 @@
           </a:ln>
         </p:spPr>
         <p:txBody>
-          <a:bodyPr wrap="square" lIns="91440" tIns="27432" rIns="73152" bIns="27432" anchor="ctr" rtlCol="0">
+          <a:bodyPr wrap="square" lIns="91440" tIns="27432" rIns="73152" bIns="27432" rtlCol="0" anchor="ctr">
             <a:noAutofit/>
           </a:bodyPr>
           <a:lstStyle/>
@@ -20632,7 +21298,7 @@
           </a:ln>
         </p:spPr>
         <p:txBody>
-          <a:bodyPr wrap="square" lIns="91440" tIns="27432" rIns="73152" bIns="27432" anchor="ctr" rtlCol="0">
+          <a:bodyPr wrap="square" lIns="91440" tIns="27432" rIns="73152" bIns="27432" rtlCol="0" anchor="ctr">
             <a:noAutofit/>
           </a:bodyPr>
           <a:lstStyle/>
@@ -20708,7 +21374,7 @@
           </a:ln>
         </p:spPr>
         <p:txBody>
-          <a:bodyPr wrap="square" lIns="91440" tIns="27432" rIns="73152" bIns="27432" anchor="ctr" rtlCol="0">
+          <a:bodyPr wrap="square" lIns="91440" tIns="27432" rIns="73152" bIns="27432" rtlCol="0" anchor="ctr">
             <a:noAutofit/>
           </a:bodyPr>
           <a:lstStyle/>
@@ -20763,7 +21429,7 @@
           </a:ln>
         </p:spPr>
         <p:txBody>
-          <a:bodyPr wrap="square" lIns="91440" tIns="27432" rIns="73152" bIns="27432" anchor="ctr" rtlCol="0">
+          <a:bodyPr wrap="square" lIns="91440" tIns="27432" rIns="73152" bIns="27432" rtlCol="0" anchor="ctr">
             <a:noAutofit/>
           </a:bodyPr>
           <a:lstStyle/>
@@ -20818,7 +21484,7 @@
           </a:ln>
         </p:spPr>
         <p:txBody>
-          <a:bodyPr wrap="square" lIns="91440" tIns="27432" rIns="73152" bIns="27432" anchor="ctr" rtlCol="0">
+          <a:bodyPr wrap="square" lIns="91440" tIns="27432" rIns="73152" bIns="27432" rtlCol="0" anchor="ctr">
             <a:noAutofit/>
           </a:bodyPr>
           <a:lstStyle/>
@@ -20955,7 +21621,7 @@
           </a:ln>
         </p:spPr>
         <p:txBody>
-          <a:bodyPr wrap="square" lIns="0" tIns="0" rIns="0" bIns="0" anchor="ctr" rtlCol="0">
+          <a:bodyPr wrap="square" lIns="0" tIns="0" rIns="0" bIns="0" rtlCol="0" anchor="ctr">
             <a:noAutofit/>
           </a:bodyPr>
           <a:lstStyle/>
@@ -21006,7 +21672,7 @@
           </a:ln>
         </p:spPr>
         <p:txBody>
-          <a:bodyPr wrap="square" lIns="0" tIns="0" rIns="0" bIns="0" anchor="ctr" rtlCol="0">
+          <a:bodyPr wrap="square" lIns="0" tIns="0" rIns="0" bIns="0" rtlCol="0" anchor="ctr">
             <a:noAutofit/>
           </a:bodyPr>
           <a:lstStyle/>
@@ -21057,7 +21723,7 @@
           </a:ln>
         </p:spPr>
         <p:txBody>
-          <a:bodyPr wrap="square" lIns="0" tIns="0" rIns="0" bIns="0" anchor="ctr" rtlCol="0">
+          <a:bodyPr wrap="square" lIns="0" tIns="0" rIns="0" bIns="0" rtlCol="0" anchor="ctr">
             <a:noAutofit/>
           </a:bodyPr>
           <a:lstStyle/>
@@ -21077,6 +21743,15 @@
               </a:rPr>
               <a:t>9</a:t>
             </a:fld>
+            <a:endParaRPr lang="en-US" sz="1000" dirty="0">
+              <a:solidFill>
+                <a:schemeClr val="tx2">
+                  <a:lumMod val="65000"/>
+                  <a:lumOff val="35000"/>
+                </a:schemeClr>
+              </a:solidFill>
+              <a:latin typeface="+mn-lt"/>
+            </a:endParaRPr>
           </a:p>
         </p:txBody>
       </p:sp>
@@ -21381,4 +22056,319 @@
     </a:ext>
   </a:extLst>
 </a:theme>
+</file>
+
+<file path=ppt/theme/theme2.xml><?xml version="1.0" encoding="utf-8"?>
+<a:theme xmlns:a="http://schemas.openxmlformats.org/drawingml/2006/main" name="Office Theme">
+  <a:themeElements>
+    <a:clrScheme name="Office">
+      <a:dk1>
+        <a:sysClr val="windowText" lastClr="000000"/>
+      </a:dk1>
+      <a:lt1>
+        <a:sysClr val="window" lastClr="FFFFFF"/>
+      </a:lt1>
+      <a:dk2>
+        <a:srgbClr val="0E2841"/>
+      </a:dk2>
+      <a:lt2>
+        <a:srgbClr val="E8E8E8"/>
+      </a:lt2>
+      <a:accent1>
+        <a:srgbClr val="156082"/>
+      </a:accent1>
+      <a:accent2>
+        <a:srgbClr val="E97132"/>
+      </a:accent2>
+      <a:accent3>
+        <a:srgbClr val="196B24"/>
+      </a:accent3>
+      <a:accent4>
+        <a:srgbClr val="0F9ED5"/>
+      </a:accent4>
+      <a:accent5>
+        <a:srgbClr val="A02B93"/>
+      </a:accent5>
+      <a:accent6>
+        <a:srgbClr val="4EA72E"/>
+      </a:accent6>
+      <a:hlink>
+        <a:srgbClr val="467886"/>
+      </a:hlink>
+      <a:folHlink>
+        <a:srgbClr val="96607D"/>
+      </a:folHlink>
+    </a:clrScheme>
+    <a:fontScheme name="Office">
+      <a:majorFont>
+        <a:latin typeface="Aptos Display" panose="02110004020202020204"/>
+        <a:ea typeface=""/>
+        <a:cs typeface=""/>
+        <a:font script="Jpan" typeface="游ゴシック Light"/>
+        <a:font script="Hang" typeface="맑은 고딕"/>
+        <a:font script="Hans" typeface="等线 Light"/>
+        <a:font script="Hant" typeface="新細明體"/>
+        <a:font script="Arab" typeface="Times New Roman"/>
+        <a:font script="Hebr" typeface="Times New Roman"/>
+        <a:font script="Thai" typeface="Angsana New"/>
+        <a:font script="Ethi" typeface="Nyala"/>
+        <a:font script="Beng" typeface="Vrinda"/>
+        <a:font script="Gujr" typeface="Shruti"/>
+        <a:font script="Khmr" typeface="MoolBoran"/>
+        <a:font script="Knda" typeface="Tunga"/>
+        <a:font script="Guru" typeface="Raavi"/>
+        <a:font script="Cans" typeface="Euphemia"/>
+        <a:font script="Cher" typeface="Plantagenet Cherokee"/>
+        <a:font script="Yiii" typeface="Microsoft Yi Baiti"/>
+        <a:font script="Tibt" typeface="Microsoft Himalaya"/>
+        <a:font script="Thaa" typeface="MV Boli"/>
+        <a:font script="Deva" typeface="Mangal"/>
+        <a:font script="Telu" typeface="Gautami"/>
+        <a:font script="Taml" typeface="Latha"/>
+        <a:font script="Syrc" typeface="Estrangelo Edessa"/>
+        <a:font script="Orya" typeface="Kalinga"/>
+        <a:font script="Mlym" typeface="Kartika"/>
+        <a:font script="Laoo" typeface="DokChampa"/>
+        <a:font script="Sinh" typeface="Iskoola Pota"/>
+        <a:font script="Mong" typeface="Mongolian Baiti"/>
+        <a:font script="Viet" typeface="Times New Roman"/>
+        <a:font script="Uigh" typeface="Microsoft Uighur"/>
+        <a:font script="Geor" typeface="Sylfaen"/>
+        <a:font script="Armn" typeface="Arial"/>
+        <a:font script="Bugi" typeface="Leelawadee UI"/>
+        <a:font script="Bopo" typeface="Microsoft JhengHei"/>
+        <a:font script="Java" typeface="Javanese Text"/>
+        <a:font script="Lisu" typeface="Segoe UI"/>
+        <a:font script="Mymr" typeface="Myanmar Text"/>
+        <a:font script="Nkoo" typeface="Ebrima"/>
+        <a:font script="Olck" typeface="Nirmala UI"/>
+        <a:font script="Osma" typeface="Ebrima"/>
+        <a:font script="Phag" typeface="Phagspa"/>
+        <a:font script="Syrn" typeface="Estrangelo Edessa"/>
+        <a:font script="Syrj" typeface="Estrangelo Edessa"/>
+        <a:font script="Syre" typeface="Estrangelo Edessa"/>
+        <a:font script="Sora" typeface="Nirmala UI"/>
+        <a:font script="Tale" typeface="Microsoft Tai Le"/>
+        <a:font script="Talu" typeface="Microsoft New Tai Lue"/>
+        <a:font script="Tfng" typeface="Ebrima"/>
+      </a:majorFont>
+      <a:minorFont>
+        <a:latin typeface="Aptos" panose="02110004020202020204"/>
+        <a:ea typeface=""/>
+        <a:cs typeface=""/>
+        <a:font script="Jpan" typeface="游ゴシック"/>
+        <a:font script="Hang" typeface="맑은 고딕"/>
+        <a:font script="Hans" typeface="等线"/>
+        <a:font script="Hant" typeface="新細明體"/>
+        <a:font script="Arab" typeface="Arial"/>
+        <a:font script="Hebr" typeface="Arial"/>
+        <a:font script="Thai" typeface="Cordia New"/>
+        <a:font script="Ethi" typeface="Nyala"/>
+        <a:font script="Beng" typeface="Vrinda"/>
+        <a:font script="Gujr" typeface="Shruti"/>
+        <a:font script="Khmr" typeface="DaunPenh"/>
+        <a:font script="Knda" typeface="Tunga"/>
+        <a:font script="Guru" typeface="Raavi"/>
+        <a:font script="Cans" typeface="Euphemia"/>
+        <a:font script="Cher" typeface="Plantagenet Cherokee"/>
+        <a:font script="Yiii" typeface="Microsoft Yi Baiti"/>
+        <a:font script="Tibt" typeface="Microsoft Himalaya"/>
+        <a:font script="Thaa" typeface="MV Boli"/>
+        <a:font script="Deva" typeface="Mangal"/>
+        <a:font script="Telu" typeface="Gautami"/>
+        <a:font script="Taml" typeface="Latha"/>
+        <a:font script="Syrc" typeface="Estrangelo Edessa"/>
+        <a:font script="Orya" typeface="Kalinga"/>
+        <a:font script="Mlym" typeface="Kartika"/>
+        <a:font script="Laoo" typeface="DokChampa"/>
+        <a:font script="Sinh" typeface="Iskoola Pota"/>
+        <a:font script="Mong" typeface="Mongolian Baiti"/>
+        <a:font script="Viet" typeface="Arial"/>
+        <a:font script="Uigh" typeface="Microsoft Uighur"/>
+        <a:font script="Geor" typeface="Sylfaen"/>
+        <a:font script="Armn" typeface="Arial"/>
+        <a:font script="Bugi" typeface="Leelawadee UI"/>
+        <a:font script="Bopo" typeface="Microsoft JhengHei"/>
+        <a:font script="Java" typeface="Javanese Text"/>
+        <a:font script="Lisu" typeface="Segoe UI"/>
+        <a:font script="Mymr" typeface="Myanmar Text"/>
+        <a:font script="Nkoo" typeface="Ebrima"/>
+        <a:font script="Olck" typeface="Nirmala UI"/>
+        <a:font script="Osma" typeface="Ebrima"/>
+        <a:font script="Phag" typeface="Phagspa"/>
+        <a:font script="Syrn" typeface="Estrangelo Edessa"/>
+        <a:font script="Syrj" typeface="Estrangelo Edessa"/>
+        <a:font script="Syre" typeface="Estrangelo Edessa"/>
+        <a:font script="Sora" typeface="Nirmala UI"/>
+        <a:font script="Tale" typeface="Microsoft Tai Le"/>
+        <a:font script="Talu" typeface="Microsoft New Tai Lue"/>
+        <a:font script="Tfng" typeface="Ebrima"/>
+      </a:minorFont>
+    </a:fontScheme>
+    <a:fmtScheme name="Office">
+      <a:fillStyleLst>
+        <a:solidFill>
+          <a:schemeClr val="phClr"/>
+        </a:solidFill>
+        <a:gradFill rotWithShape="1">
+          <a:gsLst>
+            <a:gs pos="0">
+              <a:schemeClr val="phClr">
+                <a:lumMod val="110000"/>
+                <a:satMod val="105000"/>
+                <a:tint val="67000"/>
+              </a:schemeClr>
+            </a:gs>
+            <a:gs pos="50000">
+              <a:schemeClr val="phClr">
+                <a:lumMod val="105000"/>
+                <a:satMod val="103000"/>
+                <a:tint val="73000"/>
+              </a:schemeClr>
+            </a:gs>
+            <a:gs pos="100000">
+              <a:schemeClr val="phClr">
+                <a:lumMod val="105000"/>
+                <a:satMod val="109000"/>
+                <a:tint val="81000"/>
+              </a:schemeClr>
+            </a:gs>
+          </a:gsLst>
+          <a:lin ang="5400000" scaled="0"/>
+        </a:gradFill>
+        <a:gradFill rotWithShape="1">
+          <a:gsLst>
+            <a:gs pos="0">
+              <a:schemeClr val="phClr">
+                <a:satMod val="103000"/>
+                <a:lumMod val="102000"/>
+                <a:tint val="94000"/>
+              </a:schemeClr>
+            </a:gs>
+            <a:gs pos="50000">
+              <a:schemeClr val="phClr">
+                <a:satMod val="110000"/>
+                <a:lumMod val="100000"/>
+                <a:shade val="100000"/>
+              </a:schemeClr>
+            </a:gs>
+            <a:gs pos="100000">
+              <a:schemeClr val="phClr">
+                <a:lumMod val="99000"/>
+                <a:satMod val="120000"/>
+                <a:shade val="78000"/>
+              </a:schemeClr>
+            </a:gs>
+          </a:gsLst>
+          <a:lin ang="5400000" scaled="0"/>
+        </a:gradFill>
+      </a:fillStyleLst>
+      <a:lnStyleLst>
+        <a:ln w="12700" cap="flat" cmpd="sng" algn="ctr">
+          <a:solidFill>
+            <a:schemeClr val="phClr"/>
+          </a:solidFill>
+          <a:prstDash val="solid"/>
+          <a:miter lim="800000"/>
+        </a:ln>
+        <a:ln w="19050" cap="flat" cmpd="sng" algn="ctr">
+          <a:solidFill>
+            <a:schemeClr val="phClr"/>
+          </a:solidFill>
+          <a:prstDash val="solid"/>
+          <a:miter lim="800000"/>
+        </a:ln>
+        <a:ln w="25400" cap="flat" cmpd="sng" algn="ctr">
+          <a:solidFill>
+            <a:schemeClr val="phClr"/>
+          </a:solidFill>
+          <a:prstDash val="solid"/>
+          <a:miter lim="800000"/>
+        </a:ln>
+      </a:lnStyleLst>
+      <a:effectStyleLst>
+        <a:effectStyle>
+          <a:effectLst/>
+        </a:effectStyle>
+        <a:effectStyle>
+          <a:effectLst/>
+        </a:effectStyle>
+        <a:effectStyle>
+          <a:effectLst>
+            <a:outerShdw blurRad="57150" dist="19050" dir="5400000" algn="ctr" rotWithShape="0">
+              <a:srgbClr val="000000">
+                <a:alpha val="63000"/>
+              </a:srgbClr>
+            </a:outerShdw>
+          </a:effectLst>
+        </a:effectStyle>
+      </a:effectStyleLst>
+      <a:bgFillStyleLst>
+        <a:solidFill>
+          <a:schemeClr val="phClr"/>
+        </a:solidFill>
+        <a:solidFill>
+          <a:schemeClr val="phClr">
+            <a:tint val="95000"/>
+            <a:satMod val="170000"/>
+          </a:schemeClr>
+        </a:solidFill>
+        <a:gradFill rotWithShape="1">
+          <a:gsLst>
+            <a:gs pos="0">
+              <a:schemeClr val="phClr">
+                <a:tint val="93000"/>
+                <a:satMod val="150000"/>
+                <a:shade val="98000"/>
+                <a:lumMod val="102000"/>
+              </a:schemeClr>
+            </a:gs>
+            <a:gs pos="50000">
+              <a:schemeClr val="phClr">
+                <a:tint val="98000"/>
+                <a:satMod val="130000"/>
+                <a:shade val="90000"/>
+                <a:lumMod val="103000"/>
+              </a:schemeClr>
+            </a:gs>
+            <a:gs pos="100000">
+              <a:schemeClr val="phClr">
+                <a:shade val="63000"/>
+                <a:satMod val="120000"/>
+              </a:schemeClr>
+            </a:gs>
+          </a:gsLst>
+          <a:lin ang="5400000" scaled="0"/>
+        </a:gradFill>
+      </a:bgFillStyleLst>
+    </a:fmtScheme>
+  </a:themeElements>
+  <a:objectDefaults>
+    <a:lnDef>
+      <a:spPr/>
+      <a:bodyPr/>
+      <a:lstStyle/>
+      <a:style>
+        <a:lnRef idx="2">
+          <a:schemeClr val="accent1"/>
+        </a:lnRef>
+        <a:fillRef idx="0">
+          <a:schemeClr val="accent1"/>
+        </a:fillRef>
+        <a:effectRef idx="1">
+          <a:schemeClr val="accent1"/>
+        </a:effectRef>
+        <a:fontRef idx="minor">
+          <a:schemeClr val="tx1"/>
+        </a:fontRef>
+      </a:style>
+    </a:lnDef>
+  </a:objectDefaults>
+  <a:extraClrSchemeLst/>
+  <a:extLst>
+    <a:ext uri="{05A4C25C-085E-4340-85A3-A5531E510DB2}">
+      <thm15:themeFamily xmlns:thm15="http://schemas.microsoft.com/office/thememl/2012/main" name="Office Theme" id="{2E142A2C-CD16-42D6-873A-C26D2A0506FA}" vid="{1BDDFF52-6CD6-40A5-AB3C-68EB2F1E4D0A}"/>
+    </a:ext>
+  </a:extLst>
+</a:theme>
 </file>